--- a/docs/pptx/whole/ritu-linsubhr-ratio-hosp7.pptx
+++ b/docs/pptx/whole/ritu-linsubhr-ratio-hosp7.pptx
@@ -2443,7 +2443,7 @@
           </p:nvSpPr>
           <p:spPr>
             <a:xfrm>
-              <a:off x="1424129" y="2073503"/>
+              <a:off x="1425728" y="2073503"/>
               <a:ext cx="0" cy="3649639"/>
             </a:xfrm>
             <a:custGeom>
@@ -2486,7 +2486,7 @@
           </p:nvSpPr>
           <p:spPr>
             <a:xfrm>
-              <a:off x="3298684" y="2073503"/>
+              <a:off x="3298283" y="2073503"/>
               <a:ext cx="0" cy="3649639"/>
             </a:xfrm>
             <a:custGeom>
@@ -2529,7 +2529,7 @@
           </p:nvSpPr>
           <p:spPr>
             <a:xfrm>
-              <a:off x="5173239" y="2073503"/>
+              <a:off x="5170839" y="2073503"/>
               <a:ext cx="0" cy="3649639"/>
             </a:xfrm>
             <a:custGeom>
@@ -2572,7 +2572,7 @@
           </p:nvSpPr>
           <p:spPr>
             <a:xfrm>
-              <a:off x="7047795" y="2073503"/>
+              <a:off x="7043395" y="2073503"/>
               <a:ext cx="0" cy="3649639"/>
             </a:xfrm>
             <a:custGeom>
@@ -2830,7 +2830,7 @@
           </p:nvSpPr>
           <p:spPr>
             <a:xfrm>
-              <a:off x="2361407" y="2073503"/>
+              <a:off x="2362006" y="2073503"/>
               <a:ext cx="0" cy="3649639"/>
             </a:xfrm>
             <a:custGeom>
@@ -2873,7 +2873,7 @@
           </p:nvSpPr>
           <p:spPr>
             <a:xfrm>
-              <a:off x="4235962" y="2073503"/>
+              <a:off x="4234561" y="2073503"/>
               <a:ext cx="0" cy="3649639"/>
             </a:xfrm>
             <a:custGeom>
@@ -2916,7 +2916,7 @@
           </p:nvSpPr>
           <p:spPr>
             <a:xfrm>
-              <a:off x="6110517" y="2073503"/>
+              <a:off x="6107117" y="2073503"/>
               <a:ext cx="0" cy="3649639"/>
             </a:xfrm>
             <a:custGeom>
@@ -2959,7 +2959,7 @@
           </p:nvSpPr>
           <p:spPr>
             <a:xfrm>
-              <a:off x="7985072" y="2073503"/>
+              <a:off x="7979673" y="2073503"/>
               <a:ext cx="0" cy="3649639"/>
             </a:xfrm>
             <a:custGeom>
@@ -3003,578 +3003,578 @@
           <p:spPr>
             <a:xfrm>
               <a:off x="1172049" y="2073503"/>
-              <a:ext cx="7090630" cy="3412073"/>
+              <a:ext cx="7090630" cy="3412424"/>
             </a:xfrm>
             <a:custGeom>
               <a:avLst/>
               <a:pathLst>
-                <a:path w="7090630" h="3412073">
+                <a:path w="7090630" h="3412424">
                   <a:moveTo>
-                    <a:pt x="827613" y="0"/>
+                    <a:pt x="832617" y="0"/>
                   </a:moveTo>
                   <a:lnTo>
-                    <a:pt x="859470" y="68974"/>
-                  </a:lnTo>
-                  <a:lnTo>
-                    <a:pt x="931092" y="217309"/>
-                  </a:lnTo>
-                  <a:lnTo>
-                    <a:pt x="1002715" y="359200"/>
-                  </a:lnTo>
-                  <a:lnTo>
-                    <a:pt x="1074337" y="494928"/>
-                  </a:lnTo>
-                  <a:lnTo>
-                    <a:pt x="1145960" y="624760"/>
-                  </a:lnTo>
-                  <a:lnTo>
-                    <a:pt x="1217582" y="748952"/>
-                  </a:lnTo>
-                  <a:lnTo>
-                    <a:pt x="1289205" y="867750"/>
-                  </a:lnTo>
-                  <a:lnTo>
-                    <a:pt x="1360827" y="981386"/>
-                  </a:lnTo>
-                  <a:lnTo>
-                    <a:pt x="1432450" y="1090087"/>
-                  </a:lnTo>
-                  <a:lnTo>
-                    <a:pt x="1504073" y="1194066"/>
-                  </a:lnTo>
-                  <a:lnTo>
-                    <a:pt x="1575695" y="1293528"/>
-                  </a:lnTo>
-                  <a:lnTo>
-                    <a:pt x="1647318" y="1388669"/>
-                  </a:lnTo>
-                  <a:lnTo>
-                    <a:pt x="1718940" y="1479678"/>
-                  </a:lnTo>
-                  <a:lnTo>
-                    <a:pt x="1790563" y="1566733"/>
-                  </a:lnTo>
-                  <a:lnTo>
-                    <a:pt x="1862185" y="1650006"/>
-                  </a:lnTo>
-                  <a:lnTo>
-                    <a:pt x="1933808" y="1729663"/>
-                  </a:lnTo>
-                  <a:lnTo>
-                    <a:pt x="2005430" y="1805859"/>
-                  </a:lnTo>
-                  <a:lnTo>
-                    <a:pt x="2077053" y="1878745"/>
-                  </a:lnTo>
-                  <a:lnTo>
-                    <a:pt x="2148675" y="1948465"/>
-                  </a:lnTo>
-                  <a:lnTo>
-                    <a:pt x="2220298" y="2015156"/>
-                  </a:lnTo>
-                  <a:lnTo>
-                    <a:pt x="2291920" y="2078951"/>
-                  </a:lnTo>
-                  <a:lnTo>
-                    <a:pt x="2363543" y="2139974"/>
-                  </a:lnTo>
-                  <a:lnTo>
-                    <a:pt x="2435165" y="2198346"/>
-                  </a:lnTo>
-                  <a:lnTo>
-                    <a:pt x="2506788" y="2254183"/>
-                  </a:lnTo>
-                  <a:lnTo>
-                    <a:pt x="2578410" y="2307594"/>
-                  </a:lnTo>
-                  <a:lnTo>
-                    <a:pt x="2650033" y="2358686"/>
-                  </a:lnTo>
-                  <a:lnTo>
-                    <a:pt x="2721655" y="2407557"/>
-                  </a:lnTo>
-                  <a:lnTo>
-                    <a:pt x="2793278" y="2454306"/>
-                  </a:lnTo>
-                  <a:lnTo>
-                    <a:pt x="2864901" y="2499024"/>
-                  </a:lnTo>
-                  <a:lnTo>
-                    <a:pt x="2936523" y="2541800"/>
-                  </a:lnTo>
-                  <a:lnTo>
-                    <a:pt x="3008146" y="2582717"/>
-                  </a:lnTo>
-                  <a:lnTo>
-                    <a:pt x="3079768" y="2621857"/>
-                  </a:lnTo>
-                  <a:lnTo>
-                    <a:pt x="3151391" y="2653491"/>
-                  </a:lnTo>
-                  <a:lnTo>
-                    <a:pt x="3223013" y="2647667"/>
-                  </a:lnTo>
-                  <a:lnTo>
-                    <a:pt x="3294636" y="2641802"/>
-                  </a:lnTo>
-                  <a:lnTo>
-                    <a:pt x="3366258" y="2635896"/>
-                  </a:lnTo>
-                  <a:lnTo>
-                    <a:pt x="3437881" y="2629948"/>
-                  </a:lnTo>
-                  <a:lnTo>
-                    <a:pt x="3509503" y="2623959"/>
-                  </a:lnTo>
-                  <a:lnTo>
-                    <a:pt x="3581126" y="2617928"/>
-                  </a:lnTo>
-                  <a:lnTo>
-                    <a:pt x="3652748" y="2611854"/>
-                  </a:lnTo>
-                  <a:lnTo>
-                    <a:pt x="3724371" y="2605738"/>
-                  </a:lnTo>
-                  <a:lnTo>
-                    <a:pt x="3795993" y="2599579"/>
-                  </a:lnTo>
-                  <a:lnTo>
-                    <a:pt x="3867616" y="2593377"/>
-                  </a:lnTo>
-                  <a:lnTo>
-                    <a:pt x="3939238" y="2587131"/>
-                  </a:lnTo>
-                  <a:lnTo>
-                    <a:pt x="4010861" y="2580842"/>
-                  </a:lnTo>
-                  <a:lnTo>
-                    <a:pt x="4082483" y="2574508"/>
-                  </a:lnTo>
-                  <a:lnTo>
-                    <a:pt x="4154106" y="2568130"/>
-                  </a:lnTo>
-                  <a:lnTo>
-                    <a:pt x="4225729" y="2561707"/>
-                  </a:lnTo>
-                  <a:lnTo>
-                    <a:pt x="4297351" y="2555239"/>
-                  </a:lnTo>
-                  <a:lnTo>
-                    <a:pt x="4368974" y="2548726"/>
-                  </a:lnTo>
-                  <a:lnTo>
-                    <a:pt x="4440596" y="2542167"/>
-                  </a:lnTo>
-                  <a:lnTo>
-                    <a:pt x="4512219" y="2535562"/>
-                  </a:lnTo>
-                  <a:lnTo>
-                    <a:pt x="4583841" y="2528911"/>
-                  </a:lnTo>
-                  <a:lnTo>
-                    <a:pt x="4655464" y="2522213"/>
-                  </a:lnTo>
-                  <a:lnTo>
-                    <a:pt x="4727086" y="2515468"/>
-                  </a:lnTo>
-                  <a:lnTo>
-                    <a:pt x="4798709" y="2508675"/>
-                  </a:lnTo>
-                  <a:lnTo>
-                    <a:pt x="4870331" y="2501836"/>
-                  </a:lnTo>
-                  <a:lnTo>
-                    <a:pt x="4941954" y="2494948"/>
-                  </a:lnTo>
-                  <a:lnTo>
-                    <a:pt x="5013576" y="2488011"/>
-                  </a:lnTo>
-                  <a:lnTo>
-                    <a:pt x="5085199" y="2481027"/>
-                  </a:lnTo>
-                  <a:lnTo>
-                    <a:pt x="5156821" y="2473993"/>
-                  </a:lnTo>
-                  <a:lnTo>
-                    <a:pt x="5228444" y="2466909"/>
-                  </a:lnTo>
-                  <a:lnTo>
-                    <a:pt x="5300066" y="2459777"/>
-                  </a:lnTo>
-                  <a:lnTo>
-                    <a:pt x="5371689" y="2452594"/>
-                  </a:lnTo>
-                  <a:lnTo>
-                    <a:pt x="5443311" y="2445360"/>
-                  </a:lnTo>
-                  <a:lnTo>
-                    <a:pt x="5514934" y="2438076"/>
-                  </a:lnTo>
-                  <a:lnTo>
-                    <a:pt x="5586557" y="2430741"/>
-                  </a:lnTo>
-                  <a:lnTo>
-                    <a:pt x="5658179" y="2423355"/>
-                  </a:lnTo>
-                  <a:lnTo>
-                    <a:pt x="5729802" y="2415916"/>
-                  </a:lnTo>
-                  <a:lnTo>
-                    <a:pt x="5801424" y="2408426"/>
-                  </a:lnTo>
-                  <a:lnTo>
-                    <a:pt x="5873047" y="2400882"/>
-                  </a:lnTo>
-                  <a:lnTo>
-                    <a:pt x="5944669" y="2393286"/>
-                  </a:lnTo>
-                  <a:lnTo>
-                    <a:pt x="6016292" y="2385637"/>
-                  </a:lnTo>
-                  <a:lnTo>
-                    <a:pt x="6087914" y="2377934"/>
-                  </a:lnTo>
-                  <a:lnTo>
-                    <a:pt x="6159537" y="2370177"/>
-                  </a:lnTo>
-                  <a:lnTo>
-                    <a:pt x="6231159" y="2362366"/>
-                  </a:lnTo>
-                  <a:lnTo>
-                    <a:pt x="6302782" y="2354499"/>
-                  </a:lnTo>
-                  <a:lnTo>
-                    <a:pt x="6374404" y="2346578"/>
-                  </a:lnTo>
-                  <a:lnTo>
-                    <a:pt x="6446027" y="2338601"/>
-                  </a:lnTo>
-                  <a:lnTo>
-                    <a:pt x="6517649" y="2330568"/>
-                  </a:lnTo>
-                  <a:lnTo>
-                    <a:pt x="6589272" y="2322479"/>
-                  </a:lnTo>
-                  <a:lnTo>
-                    <a:pt x="6660894" y="2314333"/>
-                  </a:lnTo>
-                  <a:lnTo>
-                    <a:pt x="6732517" y="2306129"/>
-                  </a:lnTo>
-                  <a:lnTo>
-                    <a:pt x="6804139" y="2297869"/>
-                  </a:lnTo>
-                  <a:lnTo>
-                    <a:pt x="6875762" y="2289550"/>
-                  </a:lnTo>
-                  <a:lnTo>
-                    <a:pt x="6947385" y="2281173"/>
-                  </a:lnTo>
-                  <a:lnTo>
-                    <a:pt x="7019007" y="2272737"/>
-                  </a:lnTo>
-                  <a:lnTo>
-                    <a:pt x="7090630" y="2264242"/>
-                  </a:lnTo>
-                  <a:lnTo>
-                    <a:pt x="7090630" y="3412073"/>
-                  </a:lnTo>
-                  <a:lnTo>
-                    <a:pt x="7019007" y="3408819"/>
-                  </a:lnTo>
-                  <a:lnTo>
-                    <a:pt x="6947385" y="3405416"/>
-                  </a:lnTo>
-                  <a:lnTo>
-                    <a:pt x="6875762" y="3401859"/>
-                  </a:lnTo>
-                  <a:lnTo>
-                    <a:pt x="6804139" y="3398140"/>
-                  </a:lnTo>
-                  <a:lnTo>
-                    <a:pt x="6732517" y="3394253"/>
-                  </a:lnTo>
-                  <a:lnTo>
-                    <a:pt x="6660894" y="3390189"/>
-                  </a:lnTo>
-                  <a:lnTo>
-                    <a:pt x="6589272" y="3385940"/>
-                  </a:lnTo>
-                  <a:lnTo>
-                    <a:pt x="6517649" y="3381498"/>
-                  </a:lnTo>
-                  <a:lnTo>
-                    <a:pt x="6446027" y="3376855"/>
-                  </a:lnTo>
-                  <a:lnTo>
-                    <a:pt x="6374404" y="3372001"/>
-                  </a:lnTo>
-                  <a:lnTo>
-                    <a:pt x="6302782" y="3366926"/>
-                  </a:lnTo>
-                  <a:lnTo>
-                    <a:pt x="6231159" y="3361621"/>
-                  </a:lnTo>
-                  <a:lnTo>
-                    <a:pt x="6159537" y="3356076"/>
-                  </a:lnTo>
-                  <a:lnTo>
-                    <a:pt x="6087914" y="3350278"/>
-                  </a:lnTo>
-                  <a:lnTo>
-                    <a:pt x="6016292" y="3344217"/>
-                  </a:lnTo>
-                  <a:lnTo>
-                    <a:pt x="5944669" y="3337880"/>
-                  </a:lnTo>
-                  <a:lnTo>
-                    <a:pt x="5873047" y="3331256"/>
-                  </a:lnTo>
-                  <a:lnTo>
-                    <a:pt x="5801424" y="3324331"/>
-                  </a:lnTo>
-                  <a:lnTo>
-                    <a:pt x="5729802" y="3317092"/>
-                  </a:lnTo>
-                  <a:lnTo>
-                    <a:pt x="5658179" y="3309524"/>
-                  </a:lnTo>
-                  <a:lnTo>
-                    <a:pt x="5586557" y="3301612"/>
-                  </a:lnTo>
-                  <a:lnTo>
-                    <a:pt x="5514934" y="3293341"/>
-                  </a:lnTo>
-                  <a:lnTo>
-                    <a:pt x="5443311" y="3284695"/>
-                  </a:lnTo>
-                  <a:lnTo>
-                    <a:pt x="5371689" y="3275655"/>
-                  </a:lnTo>
-                  <a:lnTo>
-                    <a:pt x="5300066" y="3266205"/>
-                  </a:lnTo>
-                  <a:lnTo>
-                    <a:pt x="5228444" y="3256326"/>
-                  </a:lnTo>
-                  <a:lnTo>
-                    <a:pt x="5156821" y="3245999"/>
-                  </a:lnTo>
-                  <a:lnTo>
-                    <a:pt x="5085199" y="3235202"/>
-                  </a:lnTo>
-                  <a:lnTo>
-                    <a:pt x="5013576" y="3223916"/>
-                  </a:lnTo>
-                  <a:lnTo>
-                    <a:pt x="4941954" y="3212116"/>
-                  </a:lnTo>
-                  <a:lnTo>
-                    <a:pt x="4870331" y="3199781"/>
-                  </a:lnTo>
-                  <a:lnTo>
-                    <a:pt x="4798709" y="3186885"/>
-                  </a:lnTo>
-                  <a:lnTo>
-                    <a:pt x="4727086" y="3173404"/>
-                  </a:lnTo>
-                  <a:lnTo>
-                    <a:pt x="4655464" y="3159311"/>
-                  </a:lnTo>
-                  <a:lnTo>
-                    <a:pt x="4583841" y="3144578"/>
-                  </a:lnTo>
-                  <a:lnTo>
-                    <a:pt x="4512219" y="3129176"/>
-                  </a:lnTo>
-                  <a:lnTo>
-                    <a:pt x="4440596" y="3113074"/>
-                  </a:lnTo>
-                  <a:lnTo>
-                    <a:pt x="4368974" y="3096241"/>
-                  </a:lnTo>
-                  <a:lnTo>
-                    <a:pt x="4297351" y="3078644"/>
-                  </a:lnTo>
-                  <a:lnTo>
-                    <a:pt x="4225729" y="3060247"/>
-                  </a:lnTo>
-                  <a:lnTo>
-                    <a:pt x="4154106" y="3041015"/>
-                  </a:lnTo>
-                  <a:lnTo>
-                    <a:pt x="4082483" y="3020910"/>
-                  </a:lnTo>
-                  <a:lnTo>
-                    <a:pt x="4010861" y="2999892"/>
-                  </a:lnTo>
-                  <a:lnTo>
-                    <a:pt x="3939238" y="2977919"/>
-                  </a:lnTo>
-                  <a:lnTo>
-                    <a:pt x="3867616" y="2954949"/>
-                  </a:lnTo>
-                  <a:lnTo>
-                    <a:pt x="3795993" y="2930935"/>
-                  </a:lnTo>
-                  <a:lnTo>
-                    <a:pt x="3724371" y="2905831"/>
-                  </a:lnTo>
-                  <a:lnTo>
-                    <a:pt x="3652748" y="2879586"/>
-                  </a:lnTo>
-                  <a:lnTo>
-                    <a:pt x="3581126" y="2852150"/>
-                  </a:lnTo>
-                  <a:lnTo>
-                    <a:pt x="3509503" y="2823468"/>
-                  </a:lnTo>
-                  <a:lnTo>
-                    <a:pt x="3437881" y="2793484"/>
-                  </a:lnTo>
-                  <a:lnTo>
-                    <a:pt x="3366258" y="2762138"/>
-                  </a:lnTo>
-                  <a:lnTo>
-                    <a:pt x="3294636" y="2729368"/>
-                  </a:lnTo>
-                  <a:lnTo>
-                    <a:pt x="3223013" y="2695110"/>
-                  </a:lnTo>
-                  <a:lnTo>
-                    <a:pt x="3151391" y="2659297"/>
-                  </a:lnTo>
-                  <a:lnTo>
-                    <a:pt x="3079768" y="2659274"/>
-                  </a:lnTo>
-                  <a:lnTo>
-                    <a:pt x="3008146" y="2665018"/>
-                  </a:lnTo>
-                  <a:lnTo>
-                    <a:pt x="2936523" y="2670721"/>
-                  </a:lnTo>
-                  <a:lnTo>
-                    <a:pt x="2864901" y="2676384"/>
-                  </a:lnTo>
-                  <a:lnTo>
-                    <a:pt x="2793278" y="2682008"/>
-                  </a:lnTo>
-                  <a:lnTo>
-                    <a:pt x="2721655" y="2687593"/>
-                  </a:lnTo>
-                  <a:lnTo>
-                    <a:pt x="2650033" y="2693139"/>
-                  </a:lnTo>
-                  <a:lnTo>
-                    <a:pt x="2578410" y="2698646"/>
-                  </a:lnTo>
-                  <a:lnTo>
-                    <a:pt x="2506788" y="2704115"/>
-                  </a:lnTo>
-                  <a:lnTo>
-                    <a:pt x="2435165" y="2709546"/>
-                  </a:lnTo>
-                  <a:lnTo>
-                    <a:pt x="2363543" y="2714939"/>
-                  </a:lnTo>
-                  <a:lnTo>
-                    <a:pt x="2291920" y="2720295"/>
-                  </a:lnTo>
-                  <a:lnTo>
-                    <a:pt x="2220298" y="2725613"/>
-                  </a:lnTo>
-                  <a:lnTo>
-                    <a:pt x="2148675" y="2730894"/>
-                  </a:lnTo>
-                  <a:lnTo>
-                    <a:pt x="2077053" y="2736138"/>
-                  </a:lnTo>
-                  <a:lnTo>
-                    <a:pt x="2005430" y="2741346"/>
-                  </a:lnTo>
-                  <a:lnTo>
-                    <a:pt x="1933808" y="2746517"/>
-                  </a:lnTo>
-                  <a:lnTo>
-                    <a:pt x="1862185" y="2751653"/>
-                  </a:lnTo>
-                  <a:lnTo>
-                    <a:pt x="1790563" y="2756753"/>
-                  </a:lnTo>
-                  <a:lnTo>
-                    <a:pt x="1718940" y="2761817"/>
-                  </a:lnTo>
-                  <a:lnTo>
-                    <a:pt x="1647318" y="2766846"/>
-                  </a:lnTo>
-                  <a:lnTo>
-                    <a:pt x="1575695" y="2771840"/>
-                  </a:lnTo>
-                  <a:lnTo>
-                    <a:pt x="1504073" y="2776799"/>
-                  </a:lnTo>
-                  <a:lnTo>
-                    <a:pt x="1432450" y="2781723"/>
-                  </a:lnTo>
-                  <a:lnTo>
-                    <a:pt x="1360827" y="2786613"/>
-                  </a:lnTo>
-                  <a:lnTo>
-                    <a:pt x="1289205" y="2791470"/>
-                  </a:lnTo>
-                  <a:lnTo>
-                    <a:pt x="1217582" y="2796292"/>
-                  </a:lnTo>
-                  <a:lnTo>
-                    <a:pt x="1145960" y="2801081"/>
-                  </a:lnTo>
-                  <a:lnTo>
-                    <a:pt x="1074337" y="2805836"/>
-                  </a:lnTo>
-                  <a:lnTo>
-                    <a:pt x="1002715" y="2810558"/>
-                  </a:lnTo>
-                  <a:lnTo>
-                    <a:pt x="931092" y="2815248"/>
-                  </a:lnTo>
-                  <a:lnTo>
-                    <a:pt x="859470" y="2819904"/>
-                  </a:lnTo>
-                  <a:lnTo>
-                    <a:pt x="787847" y="2824529"/>
-                  </a:lnTo>
-                  <a:lnTo>
-                    <a:pt x="716225" y="2829121"/>
-                  </a:lnTo>
-                  <a:lnTo>
-                    <a:pt x="644602" y="2833681"/>
-                  </a:lnTo>
-                  <a:lnTo>
-                    <a:pt x="572980" y="2838209"/>
-                  </a:lnTo>
-                  <a:lnTo>
-                    <a:pt x="501357" y="2842706"/>
-                  </a:lnTo>
-                  <a:lnTo>
-                    <a:pt x="429735" y="2847171"/>
-                  </a:lnTo>
-                  <a:lnTo>
-                    <a:pt x="358112" y="2851606"/>
-                  </a:lnTo>
-                  <a:lnTo>
-                    <a:pt x="286490" y="2856009"/>
-                  </a:lnTo>
-                  <a:lnTo>
-                    <a:pt x="214867" y="2860382"/>
-                  </a:lnTo>
-                  <a:lnTo>
-                    <a:pt x="143245" y="2864724"/>
-                  </a:lnTo>
-                  <a:lnTo>
-                    <a:pt x="71622" y="2869036"/>
-                  </a:lnTo>
-                  <a:lnTo>
-                    <a:pt x="0" y="2873318"/>
+                    <a:pt x="859470" y="58442"/>
+                  </a:lnTo>
+                  <a:lnTo>
+                    <a:pt x="931092" y="207536"/>
+                  </a:lnTo>
+                  <a:lnTo>
+                    <a:pt x="1002715" y="350139"/>
+                  </a:lnTo>
+                  <a:lnTo>
+                    <a:pt x="1074337" y="486535"/>
+                  </a:lnTo>
+                  <a:lnTo>
+                    <a:pt x="1145960" y="616995"/>
+                  </a:lnTo>
+                  <a:lnTo>
+                    <a:pt x="1217582" y="741776"/>
+                  </a:lnTo>
+                  <a:lnTo>
+                    <a:pt x="1289205" y="861125"/>
+                  </a:lnTo>
+                  <a:lnTo>
+                    <a:pt x="1360827" y="975280"/>
+                  </a:lnTo>
+                  <a:lnTo>
+                    <a:pt x="1432450" y="1084466"/>
+                  </a:lnTo>
+                  <a:lnTo>
+                    <a:pt x="1504073" y="1188899"/>
+                  </a:lnTo>
+                  <a:lnTo>
+                    <a:pt x="1575695" y="1288787"/>
+                  </a:lnTo>
+                  <a:lnTo>
+                    <a:pt x="1647318" y="1384327"/>
+                  </a:lnTo>
+                  <a:lnTo>
+                    <a:pt x="1718940" y="1475708"/>
+                  </a:lnTo>
+                  <a:lnTo>
+                    <a:pt x="1790563" y="1563112"/>
+                  </a:lnTo>
+                  <a:lnTo>
+                    <a:pt x="1862185" y="1646711"/>
+                  </a:lnTo>
+                  <a:lnTo>
+                    <a:pt x="1933808" y="1726672"/>
+                  </a:lnTo>
+                  <a:lnTo>
+                    <a:pt x="2005430" y="1803152"/>
+                  </a:lnTo>
+                  <a:lnTo>
+                    <a:pt x="2077053" y="1876303"/>
+                  </a:lnTo>
+                  <a:lnTo>
+                    <a:pt x="2148675" y="1946270"/>
+                  </a:lnTo>
+                  <a:lnTo>
+                    <a:pt x="2220298" y="2013192"/>
+                  </a:lnTo>
+                  <a:lnTo>
+                    <a:pt x="2291920" y="2077200"/>
+                  </a:lnTo>
+                  <a:lnTo>
+                    <a:pt x="2363543" y="2138423"/>
+                  </a:lnTo>
+                  <a:lnTo>
+                    <a:pt x="2435165" y="2196981"/>
+                  </a:lnTo>
+                  <a:lnTo>
+                    <a:pt x="2506788" y="2252990"/>
+                  </a:lnTo>
+                  <a:lnTo>
+                    <a:pt x="2578410" y="2306561"/>
+                  </a:lnTo>
+                  <a:lnTo>
+                    <a:pt x="2650033" y="2357800"/>
+                  </a:lnTo>
+                  <a:lnTo>
+                    <a:pt x="2721655" y="2406809"/>
+                  </a:lnTo>
+                  <a:lnTo>
+                    <a:pt x="2793278" y="2453685"/>
+                  </a:lnTo>
+                  <a:lnTo>
+                    <a:pt x="2864901" y="2498520"/>
+                  </a:lnTo>
+                  <a:lnTo>
+                    <a:pt x="2936523" y="2541404"/>
+                  </a:lnTo>
+                  <a:lnTo>
+                    <a:pt x="3008146" y="2582422"/>
+                  </a:lnTo>
+                  <a:lnTo>
+                    <a:pt x="3079768" y="2621654"/>
+                  </a:lnTo>
+                  <a:lnTo>
+                    <a:pt x="3151391" y="2653481"/>
+                  </a:lnTo>
+                  <a:lnTo>
+                    <a:pt x="3223013" y="2647430"/>
+                  </a:lnTo>
+                  <a:lnTo>
+                    <a:pt x="3294636" y="2641334"/>
+                  </a:lnTo>
+                  <a:lnTo>
+                    <a:pt x="3366258" y="2635193"/>
+                  </a:lnTo>
+                  <a:lnTo>
+                    <a:pt x="3437881" y="2629008"/>
+                  </a:lnTo>
+                  <a:lnTo>
+                    <a:pt x="3509503" y="2622778"/>
+                  </a:lnTo>
+                  <a:lnTo>
+                    <a:pt x="3581126" y="2616503"/>
+                  </a:lnTo>
+                  <a:lnTo>
+                    <a:pt x="3652748" y="2610181"/>
+                  </a:lnTo>
+                  <a:lnTo>
+                    <a:pt x="3724371" y="2603814"/>
+                  </a:lnTo>
+                  <a:lnTo>
+                    <a:pt x="3795993" y="2597400"/>
+                  </a:lnTo>
+                  <a:lnTo>
+                    <a:pt x="3867616" y="2590940"/>
+                  </a:lnTo>
+                  <a:lnTo>
+                    <a:pt x="3939238" y="2584432"/>
+                  </a:lnTo>
+                  <a:lnTo>
+                    <a:pt x="4010861" y="2577877"/>
+                  </a:lnTo>
+                  <a:lnTo>
+                    <a:pt x="4082483" y="2571274"/>
+                  </a:lnTo>
+                  <a:lnTo>
+                    <a:pt x="4154106" y="2564623"/>
+                  </a:lnTo>
+                  <a:lnTo>
+                    <a:pt x="4225729" y="2557924"/>
+                  </a:lnTo>
+                  <a:lnTo>
+                    <a:pt x="4297351" y="2551176"/>
+                  </a:lnTo>
+                  <a:lnTo>
+                    <a:pt x="4368974" y="2544378"/>
+                  </a:lnTo>
+                  <a:lnTo>
+                    <a:pt x="4440596" y="2537531"/>
+                  </a:lnTo>
+                  <a:lnTo>
+                    <a:pt x="4512219" y="2530634"/>
+                  </a:lnTo>
+                  <a:lnTo>
+                    <a:pt x="4583841" y="2523687"/>
+                  </a:lnTo>
+                  <a:lnTo>
+                    <a:pt x="4655464" y="2516689"/>
+                  </a:lnTo>
+                  <a:lnTo>
+                    <a:pt x="4727086" y="2509640"/>
+                  </a:lnTo>
+                  <a:lnTo>
+                    <a:pt x="4798709" y="2502540"/>
+                  </a:lnTo>
+                  <a:lnTo>
+                    <a:pt x="4870331" y="2495388"/>
+                  </a:lnTo>
+                  <a:lnTo>
+                    <a:pt x="4941954" y="2488184"/>
+                  </a:lnTo>
+                  <a:lnTo>
+                    <a:pt x="5013576" y="2480927"/>
+                  </a:lnTo>
+                  <a:lnTo>
+                    <a:pt x="5085199" y="2473618"/>
+                  </a:lnTo>
+                  <a:lnTo>
+                    <a:pt x="5156821" y="2466255"/>
+                  </a:lnTo>
+                  <a:lnTo>
+                    <a:pt x="5228444" y="2458839"/>
+                  </a:lnTo>
+                  <a:lnTo>
+                    <a:pt x="5300066" y="2451368"/>
+                  </a:lnTo>
+                  <a:lnTo>
+                    <a:pt x="5371689" y="2443843"/>
+                  </a:lnTo>
+                  <a:lnTo>
+                    <a:pt x="5443311" y="2436264"/>
+                  </a:lnTo>
+                  <a:lnTo>
+                    <a:pt x="5514934" y="2428628"/>
+                  </a:lnTo>
+                  <a:lnTo>
+                    <a:pt x="5586557" y="2420938"/>
+                  </a:lnTo>
+                  <a:lnTo>
+                    <a:pt x="5658179" y="2413191"/>
+                  </a:lnTo>
+                  <a:lnTo>
+                    <a:pt x="5729802" y="2405388"/>
+                  </a:lnTo>
+                  <a:lnTo>
+                    <a:pt x="5801424" y="2397528"/>
+                  </a:lnTo>
+                  <a:lnTo>
+                    <a:pt x="5873047" y="2389610"/>
+                  </a:lnTo>
+                  <a:lnTo>
+                    <a:pt x="5944669" y="2381635"/>
+                  </a:lnTo>
+                  <a:lnTo>
+                    <a:pt x="6016292" y="2373602"/>
+                  </a:lnTo>
+                  <a:lnTo>
+                    <a:pt x="6087914" y="2365510"/>
+                  </a:lnTo>
+                  <a:lnTo>
+                    <a:pt x="6159537" y="2357359"/>
+                  </a:lnTo>
+                  <a:lnTo>
+                    <a:pt x="6231159" y="2349149"/>
+                  </a:lnTo>
+                  <a:lnTo>
+                    <a:pt x="6302782" y="2340879"/>
+                  </a:lnTo>
+                  <a:lnTo>
+                    <a:pt x="6374404" y="2332549"/>
+                  </a:lnTo>
+                  <a:lnTo>
+                    <a:pt x="6446027" y="2324158"/>
+                  </a:lnTo>
+                  <a:lnTo>
+                    <a:pt x="6517649" y="2315706"/>
+                  </a:lnTo>
+                  <a:lnTo>
+                    <a:pt x="6589272" y="2307192"/>
+                  </a:lnTo>
+                  <a:lnTo>
+                    <a:pt x="6660894" y="2298616"/>
+                  </a:lnTo>
+                  <a:lnTo>
+                    <a:pt x="6732517" y="2289978"/>
+                  </a:lnTo>
+                  <a:lnTo>
+                    <a:pt x="6804139" y="2281277"/>
+                  </a:lnTo>
+                  <a:lnTo>
+                    <a:pt x="6875762" y="2272512"/>
+                  </a:lnTo>
+                  <a:lnTo>
+                    <a:pt x="6947385" y="2263683"/>
+                  </a:lnTo>
+                  <a:lnTo>
+                    <a:pt x="7019007" y="2254790"/>
+                  </a:lnTo>
+                  <a:lnTo>
+                    <a:pt x="7090630" y="2245832"/>
+                  </a:lnTo>
+                  <a:lnTo>
+                    <a:pt x="7090630" y="3412424"/>
+                  </a:lnTo>
+                  <a:lnTo>
+                    <a:pt x="7019007" y="3409178"/>
+                  </a:lnTo>
+                  <a:lnTo>
+                    <a:pt x="6947385" y="3405785"/>
+                  </a:lnTo>
+                  <a:lnTo>
+                    <a:pt x="6875762" y="3402237"/>
+                  </a:lnTo>
+                  <a:lnTo>
+                    <a:pt x="6804139" y="3398527"/>
+                  </a:lnTo>
+                  <a:lnTo>
+                    <a:pt x="6732517" y="3394649"/>
+                  </a:lnTo>
+                  <a:lnTo>
+                    <a:pt x="6660894" y="3390595"/>
+                  </a:lnTo>
+                  <a:lnTo>
+                    <a:pt x="6589272" y="3386356"/>
+                  </a:lnTo>
+                  <a:lnTo>
+                    <a:pt x="6517649" y="3381923"/>
+                  </a:lnTo>
+                  <a:lnTo>
+                    <a:pt x="6446027" y="3377290"/>
+                  </a:lnTo>
+                  <a:lnTo>
+                    <a:pt x="6374404" y="3372445"/>
+                  </a:lnTo>
+                  <a:lnTo>
+                    <a:pt x="6302782" y="3367380"/>
+                  </a:lnTo>
+                  <a:lnTo>
+                    <a:pt x="6231159" y="3362084"/>
+                  </a:lnTo>
+                  <a:lnTo>
+                    <a:pt x="6159537" y="3356548"/>
+                  </a:lnTo>
+                  <a:lnTo>
+                    <a:pt x="6087914" y="3350759"/>
+                  </a:lnTo>
+                  <a:lnTo>
+                    <a:pt x="6016292" y="3344707"/>
+                  </a:lnTo>
+                  <a:lnTo>
+                    <a:pt x="5944669" y="3338380"/>
+                  </a:lnTo>
+                  <a:lnTo>
+                    <a:pt x="5873047" y="3331765"/>
+                  </a:lnTo>
+                  <a:lnTo>
+                    <a:pt x="5801424" y="3324848"/>
+                  </a:lnTo>
+                  <a:lnTo>
+                    <a:pt x="5729802" y="3317617"/>
+                  </a:lnTo>
+                  <a:lnTo>
+                    <a:pt x="5658179" y="3310057"/>
+                  </a:lnTo>
+                  <a:lnTo>
+                    <a:pt x="5586557" y="3302153"/>
+                  </a:lnTo>
+                  <a:lnTo>
+                    <a:pt x="5514934" y="3293889"/>
+                  </a:lnTo>
+                  <a:lnTo>
+                    <a:pt x="5443311" y="3285249"/>
+                  </a:lnTo>
+                  <a:lnTo>
+                    <a:pt x="5371689" y="3276216"/>
+                  </a:lnTo>
+                  <a:lnTo>
+                    <a:pt x="5300066" y="3266772"/>
+                  </a:lnTo>
+                  <a:lnTo>
+                    <a:pt x="5228444" y="3256898"/>
+                  </a:lnTo>
+                  <a:lnTo>
+                    <a:pt x="5156821" y="3246574"/>
+                  </a:lnTo>
+                  <a:lnTo>
+                    <a:pt x="5085199" y="3235781"/>
+                  </a:lnTo>
+                  <a:lnTo>
+                    <a:pt x="5013576" y="3224497"/>
+                  </a:lnTo>
+                  <a:lnTo>
+                    <a:pt x="4941954" y="3212699"/>
+                  </a:lnTo>
+                  <a:lnTo>
+                    <a:pt x="4870331" y="3200364"/>
+                  </a:lnTo>
+                  <a:lnTo>
+                    <a:pt x="4798709" y="3187468"/>
+                  </a:lnTo>
+                  <a:lnTo>
+                    <a:pt x="4727086" y="3173985"/>
+                  </a:lnTo>
+                  <a:lnTo>
+                    <a:pt x="4655464" y="3159889"/>
+                  </a:lnTo>
+                  <a:lnTo>
+                    <a:pt x="4583841" y="3145151"/>
+                  </a:lnTo>
+                  <a:lnTo>
+                    <a:pt x="4512219" y="3129742"/>
+                  </a:lnTo>
+                  <a:lnTo>
+                    <a:pt x="4440596" y="3113632"/>
+                  </a:lnTo>
+                  <a:lnTo>
+                    <a:pt x="4368974" y="3096789"/>
+                  </a:lnTo>
+                  <a:lnTo>
+                    <a:pt x="4297351" y="3079179"/>
+                  </a:lnTo>
+                  <a:lnTo>
+                    <a:pt x="4225729" y="3060768"/>
+                  </a:lnTo>
+                  <a:lnTo>
+                    <a:pt x="4154106" y="3041520"/>
+                  </a:lnTo>
+                  <a:lnTo>
+                    <a:pt x="4082483" y="3021395"/>
+                  </a:lnTo>
+                  <a:lnTo>
+                    <a:pt x="4010861" y="3000354"/>
+                  </a:lnTo>
+                  <a:lnTo>
+                    <a:pt x="3939238" y="2978356"/>
+                  </a:lnTo>
+                  <a:lnTo>
+                    <a:pt x="3867616" y="2955357"/>
+                  </a:lnTo>
+                  <a:lnTo>
+                    <a:pt x="3795993" y="2931311"/>
+                  </a:lnTo>
+                  <a:lnTo>
+                    <a:pt x="3724371" y="2906171"/>
+                  </a:lnTo>
+                  <a:lnTo>
+                    <a:pt x="3652748" y="2879887"/>
+                  </a:lnTo>
+                  <a:lnTo>
+                    <a:pt x="3581126" y="2852407"/>
+                  </a:lnTo>
+                  <a:lnTo>
+                    <a:pt x="3509503" y="2823676"/>
+                  </a:lnTo>
+                  <a:lnTo>
+                    <a:pt x="3437881" y="2793637"/>
+                  </a:lnTo>
+                  <a:lnTo>
+                    <a:pt x="3366258" y="2762232"/>
+                  </a:lnTo>
+                  <a:lnTo>
+                    <a:pt x="3294636" y="2729397"/>
+                  </a:lnTo>
+                  <a:lnTo>
+                    <a:pt x="3223013" y="2695069"/>
+                  </a:lnTo>
+                  <a:lnTo>
+                    <a:pt x="3151391" y="2659178"/>
+                  </a:lnTo>
+                  <a:lnTo>
+                    <a:pt x="3079768" y="2659489"/>
+                  </a:lnTo>
+                  <a:lnTo>
+                    <a:pt x="3008146" y="2665454"/>
+                  </a:lnTo>
+                  <a:lnTo>
+                    <a:pt x="2936523" y="2671375"/>
+                  </a:lnTo>
+                  <a:lnTo>
+                    <a:pt x="2864901" y="2677254"/>
+                  </a:lnTo>
+                  <a:lnTo>
+                    <a:pt x="2793278" y="2683089"/>
+                  </a:lnTo>
+                  <a:lnTo>
+                    <a:pt x="2721655" y="2688883"/>
+                  </a:lnTo>
+                  <a:lnTo>
+                    <a:pt x="2650033" y="2694635"/>
+                  </a:lnTo>
+                  <a:lnTo>
+                    <a:pt x="2578410" y="2700345"/>
+                  </a:lnTo>
+                  <a:lnTo>
+                    <a:pt x="2506788" y="2706014"/>
+                  </a:lnTo>
+                  <a:lnTo>
+                    <a:pt x="2435165" y="2711642"/>
+                  </a:lnTo>
+                  <a:lnTo>
+                    <a:pt x="2363543" y="2717229"/>
+                  </a:lnTo>
+                  <a:lnTo>
+                    <a:pt x="2291920" y="2722776"/>
+                  </a:lnTo>
+                  <a:lnTo>
+                    <a:pt x="2220298" y="2728282"/>
+                  </a:lnTo>
+                  <a:lnTo>
+                    <a:pt x="2148675" y="2733749"/>
+                  </a:lnTo>
+                  <a:lnTo>
+                    <a:pt x="2077053" y="2739176"/>
+                  </a:lnTo>
+                  <a:lnTo>
+                    <a:pt x="2005430" y="2744564"/>
+                  </a:lnTo>
+                  <a:lnTo>
+                    <a:pt x="1933808" y="2749913"/>
+                  </a:lnTo>
+                  <a:lnTo>
+                    <a:pt x="1862185" y="2755223"/>
+                  </a:lnTo>
+                  <a:lnTo>
+                    <a:pt x="1790563" y="2760495"/>
+                  </a:lnTo>
+                  <a:lnTo>
+                    <a:pt x="1718940" y="2765728"/>
+                  </a:lnTo>
+                  <a:lnTo>
+                    <a:pt x="1647318" y="2770924"/>
+                  </a:lnTo>
+                  <a:lnTo>
+                    <a:pt x="1575695" y="2776082"/>
+                  </a:lnTo>
+                  <a:lnTo>
+                    <a:pt x="1504073" y="2781203"/>
+                  </a:lnTo>
+                  <a:lnTo>
+                    <a:pt x="1432450" y="2786287"/>
+                  </a:lnTo>
+                  <a:lnTo>
+                    <a:pt x="1360827" y="2791334"/>
+                  </a:lnTo>
+                  <a:lnTo>
+                    <a:pt x="1289205" y="2796344"/>
+                  </a:lnTo>
+                  <a:lnTo>
+                    <a:pt x="1217582" y="2801318"/>
+                  </a:lnTo>
+                  <a:lnTo>
+                    <a:pt x="1145960" y="2806256"/>
+                  </a:lnTo>
+                  <a:lnTo>
+                    <a:pt x="1074337" y="2811159"/>
+                  </a:lnTo>
+                  <a:lnTo>
+                    <a:pt x="1002715" y="2816026"/>
+                  </a:lnTo>
+                  <a:lnTo>
+                    <a:pt x="931092" y="2820858"/>
+                  </a:lnTo>
+                  <a:lnTo>
+                    <a:pt x="859470" y="2825654"/>
+                  </a:lnTo>
+                  <a:lnTo>
+                    <a:pt x="787847" y="2830416"/>
+                  </a:lnTo>
+                  <a:lnTo>
+                    <a:pt x="716225" y="2835144"/>
+                  </a:lnTo>
+                  <a:lnTo>
+                    <a:pt x="644602" y="2839837"/>
+                  </a:lnTo>
+                  <a:lnTo>
+                    <a:pt x="572980" y="2844497"/>
+                  </a:lnTo>
+                  <a:lnTo>
+                    <a:pt x="501357" y="2849123"/>
+                  </a:lnTo>
+                  <a:lnTo>
+                    <a:pt x="429735" y="2853715"/>
+                  </a:lnTo>
+                  <a:lnTo>
+                    <a:pt x="358112" y="2858274"/>
+                  </a:lnTo>
+                  <a:lnTo>
+                    <a:pt x="286490" y="2862800"/>
+                  </a:lnTo>
+                  <a:lnTo>
+                    <a:pt x="214867" y="2867293"/>
+                  </a:lnTo>
+                  <a:lnTo>
+                    <a:pt x="143245" y="2871754"/>
+                  </a:lnTo>
+                  <a:lnTo>
+                    <a:pt x="71622" y="2876183"/>
+                  </a:lnTo>
+                  <a:lnTo>
+                    <a:pt x="0" y="2880579"/>
                   </a:lnTo>
                   <a:close/>
                 </a:path>
@@ -3600,279 +3600,279 @@
           </p:nvSpPr>
           <p:spPr>
             <a:xfrm>
-              <a:off x="1999662" y="2073503"/>
-              <a:ext cx="6263016" cy="2653491"/>
+              <a:off x="2004666" y="2073503"/>
+              <a:ext cx="6258013" cy="2653481"/>
             </a:xfrm>
             <a:custGeom>
               <a:avLst/>
               <a:pathLst>
-                <a:path w="6263016" h="2653491">
+                <a:path w="6258013" h="2653481">
                   <a:moveTo>
                     <a:pt x="0" y="0"/>
                   </a:moveTo>
                   <a:lnTo>
-                    <a:pt x="31857" y="68974"/>
-                  </a:lnTo>
-                  <a:lnTo>
-                    <a:pt x="103479" y="217309"/>
-                  </a:lnTo>
-                  <a:lnTo>
-                    <a:pt x="175102" y="359200"/>
-                  </a:lnTo>
-                  <a:lnTo>
-                    <a:pt x="246724" y="494928"/>
-                  </a:lnTo>
-                  <a:lnTo>
-                    <a:pt x="318347" y="624760"/>
-                  </a:lnTo>
-                  <a:lnTo>
-                    <a:pt x="389969" y="748952"/>
-                  </a:lnTo>
-                  <a:lnTo>
-                    <a:pt x="461592" y="867750"/>
-                  </a:lnTo>
-                  <a:lnTo>
-                    <a:pt x="533214" y="981386"/>
-                  </a:lnTo>
-                  <a:lnTo>
-                    <a:pt x="604837" y="1090087"/>
-                  </a:lnTo>
-                  <a:lnTo>
-                    <a:pt x="676459" y="1194066"/>
-                  </a:lnTo>
-                  <a:lnTo>
-                    <a:pt x="748082" y="1293528"/>
-                  </a:lnTo>
-                  <a:lnTo>
-                    <a:pt x="819704" y="1388669"/>
-                  </a:lnTo>
-                  <a:lnTo>
-                    <a:pt x="891327" y="1479678"/>
-                  </a:lnTo>
-                  <a:lnTo>
-                    <a:pt x="962949" y="1566733"/>
-                  </a:lnTo>
-                  <a:lnTo>
-                    <a:pt x="1034572" y="1650006"/>
-                  </a:lnTo>
-                  <a:lnTo>
-                    <a:pt x="1106194" y="1729663"/>
-                  </a:lnTo>
-                  <a:lnTo>
-                    <a:pt x="1177817" y="1805859"/>
-                  </a:lnTo>
-                  <a:lnTo>
-                    <a:pt x="1249439" y="1878745"/>
-                  </a:lnTo>
-                  <a:lnTo>
-                    <a:pt x="1321062" y="1948465"/>
-                  </a:lnTo>
-                  <a:lnTo>
-                    <a:pt x="1392685" y="2015156"/>
-                  </a:lnTo>
-                  <a:lnTo>
-                    <a:pt x="1464307" y="2078951"/>
-                  </a:lnTo>
-                  <a:lnTo>
-                    <a:pt x="1535930" y="2139974"/>
-                  </a:lnTo>
-                  <a:lnTo>
-                    <a:pt x="1607552" y="2198346"/>
-                  </a:lnTo>
-                  <a:lnTo>
-                    <a:pt x="1679175" y="2254183"/>
-                  </a:lnTo>
-                  <a:lnTo>
-                    <a:pt x="1750797" y="2307594"/>
-                  </a:lnTo>
-                  <a:lnTo>
-                    <a:pt x="1822420" y="2358686"/>
-                  </a:lnTo>
-                  <a:lnTo>
-                    <a:pt x="1894042" y="2407557"/>
-                  </a:lnTo>
-                  <a:lnTo>
-                    <a:pt x="1965665" y="2454306"/>
-                  </a:lnTo>
-                  <a:lnTo>
-                    <a:pt x="2037287" y="2499024"/>
-                  </a:lnTo>
-                  <a:lnTo>
-                    <a:pt x="2108910" y="2541800"/>
-                  </a:lnTo>
-                  <a:lnTo>
-                    <a:pt x="2180532" y="2582717"/>
-                  </a:lnTo>
-                  <a:lnTo>
-                    <a:pt x="2252155" y="2621857"/>
-                  </a:lnTo>
-                  <a:lnTo>
-                    <a:pt x="2323777" y="2653491"/>
-                  </a:lnTo>
-                  <a:lnTo>
-                    <a:pt x="2395400" y="2647667"/>
-                  </a:lnTo>
-                  <a:lnTo>
-                    <a:pt x="2467022" y="2641802"/>
-                  </a:lnTo>
-                  <a:lnTo>
-                    <a:pt x="2538645" y="2635896"/>
-                  </a:lnTo>
-                  <a:lnTo>
-                    <a:pt x="2610267" y="2629948"/>
-                  </a:lnTo>
-                  <a:lnTo>
-                    <a:pt x="2681890" y="2623959"/>
-                  </a:lnTo>
-                  <a:lnTo>
-                    <a:pt x="2753513" y="2617928"/>
-                  </a:lnTo>
-                  <a:lnTo>
-                    <a:pt x="2825135" y="2611854"/>
-                  </a:lnTo>
-                  <a:lnTo>
-                    <a:pt x="2896758" y="2605738"/>
-                  </a:lnTo>
-                  <a:lnTo>
-                    <a:pt x="2968380" y="2599579"/>
-                  </a:lnTo>
-                  <a:lnTo>
-                    <a:pt x="3040003" y="2593377"/>
-                  </a:lnTo>
-                  <a:lnTo>
-                    <a:pt x="3111625" y="2587131"/>
-                  </a:lnTo>
-                  <a:lnTo>
-                    <a:pt x="3183248" y="2580842"/>
-                  </a:lnTo>
-                  <a:lnTo>
-                    <a:pt x="3254870" y="2574508"/>
-                  </a:lnTo>
-                  <a:lnTo>
-                    <a:pt x="3326493" y="2568130"/>
-                  </a:lnTo>
-                  <a:lnTo>
-                    <a:pt x="3398115" y="2561707"/>
-                  </a:lnTo>
-                  <a:lnTo>
-                    <a:pt x="3469738" y="2555239"/>
-                  </a:lnTo>
-                  <a:lnTo>
-                    <a:pt x="3541360" y="2548726"/>
-                  </a:lnTo>
-                  <a:lnTo>
-                    <a:pt x="3612983" y="2542167"/>
-                  </a:lnTo>
-                  <a:lnTo>
-                    <a:pt x="3684605" y="2535562"/>
-                  </a:lnTo>
-                  <a:lnTo>
-                    <a:pt x="3756228" y="2528911"/>
-                  </a:lnTo>
-                  <a:lnTo>
-                    <a:pt x="3827850" y="2522213"/>
-                  </a:lnTo>
-                  <a:lnTo>
-                    <a:pt x="3899473" y="2515468"/>
-                  </a:lnTo>
-                  <a:lnTo>
-                    <a:pt x="3971095" y="2508675"/>
-                  </a:lnTo>
-                  <a:lnTo>
-                    <a:pt x="4042718" y="2501836"/>
-                  </a:lnTo>
-                  <a:lnTo>
-                    <a:pt x="4114341" y="2494948"/>
-                  </a:lnTo>
-                  <a:lnTo>
-                    <a:pt x="4185963" y="2488011"/>
-                  </a:lnTo>
-                  <a:lnTo>
-                    <a:pt x="4257586" y="2481027"/>
-                  </a:lnTo>
-                  <a:lnTo>
-                    <a:pt x="4329208" y="2473993"/>
-                  </a:lnTo>
-                  <a:lnTo>
-                    <a:pt x="4400831" y="2466909"/>
-                  </a:lnTo>
-                  <a:lnTo>
-                    <a:pt x="4472453" y="2459777"/>
-                  </a:lnTo>
-                  <a:lnTo>
-                    <a:pt x="4544076" y="2452594"/>
-                  </a:lnTo>
-                  <a:lnTo>
-                    <a:pt x="4615698" y="2445360"/>
-                  </a:lnTo>
-                  <a:lnTo>
-                    <a:pt x="4687321" y="2438076"/>
-                  </a:lnTo>
-                  <a:lnTo>
-                    <a:pt x="4758943" y="2430741"/>
-                  </a:lnTo>
-                  <a:lnTo>
-                    <a:pt x="4830566" y="2423355"/>
-                  </a:lnTo>
-                  <a:lnTo>
-                    <a:pt x="4902188" y="2415916"/>
-                  </a:lnTo>
-                  <a:lnTo>
-                    <a:pt x="4973811" y="2408426"/>
-                  </a:lnTo>
-                  <a:lnTo>
-                    <a:pt x="5045433" y="2400882"/>
-                  </a:lnTo>
-                  <a:lnTo>
-                    <a:pt x="5117056" y="2393286"/>
-                  </a:lnTo>
-                  <a:lnTo>
-                    <a:pt x="5188678" y="2385637"/>
-                  </a:lnTo>
-                  <a:lnTo>
-                    <a:pt x="5260301" y="2377934"/>
-                  </a:lnTo>
-                  <a:lnTo>
-                    <a:pt x="5331923" y="2370177"/>
-                  </a:lnTo>
-                  <a:lnTo>
-                    <a:pt x="5403546" y="2362366"/>
-                  </a:lnTo>
-                  <a:lnTo>
-                    <a:pt x="5475169" y="2354499"/>
-                  </a:lnTo>
-                  <a:lnTo>
-                    <a:pt x="5546791" y="2346578"/>
-                  </a:lnTo>
-                  <a:lnTo>
-                    <a:pt x="5618414" y="2338601"/>
-                  </a:lnTo>
-                  <a:lnTo>
-                    <a:pt x="5690036" y="2330568"/>
-                  </a:lnTo>
-                  <a:lnTo>
-                    <a:pt x="5761659" y="2322479"/>
-                  </a:lnTo>
-                  <a:lnTo>
-                    <a:pt x="5833281" y="2314333"/>
-                  </a:lnTo>
-                  <a:lnTo>
-                    <a:pt x="5904904" y="2306129"/>
-                  </a:lnTo>
-                  <a:lnTo>
-                    <a:pt x="5976526" y="2297869"/>
-                  </a:lnTo>
-                  <a:lnTo>
-                    <a:pt x="6048149" y="2289550"/>
-                  </a:lnTo>
-                  <a:lnTo>
-                    <a:pt x="6119771" y="2281173"/>
-                  </a:lnTo>
-                  <a:lnTo>
-                    <a:pt x="6191394" y="2272737"/>
-                  </a:lnTo>
-                  <a:lnTo>
-                    <a:pt x="6263016" y="2264242"/>
+                    <a:pt x="26853" y="58442"/>
+                  </a:lnTo>
+                  <a:lnTo>
+                    <a:pt x="98475" y="207536"/>
+                  </a:lnTo>
+                  <a:lnTo>
+                    <a:pt x="170098" y="350139"/>
+                  </a:lnTo>
+                  <a:lnTo>
+                    <a:pt x="241720" y="486535"/>
+                  </a:lnTo>
+                  <a:lnTo>
+                    <a:pt x="313343" y="616995"/>
+                  </a:lnTo>
+                  <a:lnTo>
+                    <a:pt x="384965" y="741776"/>
+                  </a:lnTo>
+                  <a:lnTo>
+                    <a:pt x="456588" y="861125"/>
+                  </a:lnTo>
+                  <a:lnTo>
+                    <a:pt x="528210" y="975280"/>
+                  </a:lnTo>
+                  <a:lnTo>
+                    <a:pt x="599833" y="1084466"/>
+                  </a:lnTo>
+                  <a:lnTo>
+                    <a:pt x="671456" y="1188899"/>
+                  </a:lnTo>
+                  <a:lnTo>
+                    <a:pt x="743078" y="1288787"/>
+                  </a:lnTo>
+                  <a:lnTo>
+                    <a:pt x="814701" y="1384327"/>
+                  </a:lnTo>
+                  <a:lnTo>
+                    <a:pt x="886323" y="1475708"/>
+                  </a:lnTo>
+                  <a:lnTo>
+                    <a:pt x="957946" y="1563112"/>
+                  </a:lnTo>
+                  <a:lnTo>
+                    <a:pt x="1029568" y="1646711"/>
+                  </a:lnTo>
+                  <a:lnTo>
+                    <a:pt x="1101191" y="1726672"/>
+                  </a:lnTo>
+                  <a:lnTo>
+                    <a:pt x="1172813" y="1803152"/>
+                  </a:lnTo>
+                  <a:lnTo>
+                    <a:pt x="1244436" y="1876303"/>
+                  </a:lnTo>
+                  <a:lnTo>
+                    <a:pt x="1316058" y="1946270"/>
+                  </a:lnTo>
+                  <a:lnTo>
+                    <a:pt x="1387681" y="2013192"/>
+                  </a:lnTo>
+                  <a:lnTo>
+                    <a:pt x="1459303" y="2077200"/>
+                  </a:lnTo>
+                  <a:lnTo>
+                    <a:pt x="1530926" y="2138423"/>
+                  </a:lnTo>
+                  <a:lnTo>
+                    <a:pt x="1602548" y="2196981"/>
+                  </a:lnTo>
+                  <a:lnTo>
+                    <a:pt x="1674171" y="2252990"/>
+                  </a:lnTo>
+                  <a:lnTo>
+                    <a:pt x="1745793" y="2306561"/>
+                  </a:lnTo>
+                  <a:lnTo>
+                    <a:pt x="1817416" y="2357800"/>
+                  </a:lnTo>
+                  <a:lnTo>
+                    <a:pt x="1889038" y="2406809"/>
+                  </a:lnTo>
+                  <a:lnTo>
+                    <a:pt x="1960661" y="2453685"/>
+                  </a:lnTo>
+                  <a:lnTo>
+                    <a:pt x="2032284" y="2498520"/>
+                  </a:lnTo>
+                  <a:lnTo>
+                    <a:pt x="2103906" y="2541404"/>
+                  </a:lnTo>
+                  <a:lnTo>
+                    <a:pt x="2175529" y="2582422"/>
+                  </a:lnTo>
+                  <a:lnTo>
+                    <a:pt x="2247151" y="2621654"/>
+                  </a:lnTo>
+                  <a:lnTo>
+                    <a:pt x="2318774" y="2653481"/>
+                  </a:lnTo>
+                  <a:lnTo>
+                    <a:pt x="2390396" y="2647430"/>
+                  </a:lnTo>
+                  <a:lnTo>
+                    <a:pt x="2462019" y="2641334"/>
+                  </a:lnTo>
+                  <a:lnTo>
+                    <a:pt x="2533641" y="2635193"/>
+                  </a:lnTo>
+                  <a:lnTo>
+                    <a:pt x="2605264" y="2629008"/>
+                  </a:lnTo>
+                  <a:lnTo>
+                    <a:pt x="2676886" y="2622778"/>
+                  </a:lnTo>
+                  <a:lnTo>
+                    <a:pt x="2748509" y="2616503"/>
+                  </a:lnTo>
+                  <a:lnTo>
+                    <a:pt x="2820131" y="2610181"/>
+                  </a:lnTo>
+                  <a:lnTo>
+                    <a:pt x="2891754" y="2603814"/>
+                  </a:lnTo>
+                  <a:lnTo>
+                    <a:pt x="2963376" y="2597400"/>
+                  </a:lnTo>
+                  <a:lnTo>
+                    <a:pt x="3034999" y="2590940"/>
+                  </a:lnTo>
+                  <a:lnTo>
+                    <a:pt x="3106621" y="2584432"/>
+                  </a:lnTo>
+                  <a:lnTo>
+                    <a:pt x="3178244" y="2577877"/>
+                  </a:lnTo>
+                  <a:lnTo>
+                    <a:pt x="3249866" y="2571274"/>
+                  </a:lnTo>
+                  <a:lnTo>
+                    <a:pt x="3321489" y="2564623"/>
+                  </a:lnTo>
+                  <a:lnTo>
+                    <a:pt x="3393112" y="2557924"/>
+                  </a:lnTo>
+                  <a:lnTo>
+                    <a:pt x="3464734" y="2551176"/>
+                  </a:lnTo>
+                  <a:lnTo>
+                    <a:pt x="3536357" y="2544378"/>
+                  </a:lnTo>
+                  <a:lnTo>
+                    <a:pt x="3607979" y="2537531"/>
+                  </a:lnTo>
+                  <a:lnTo>
+                    <a:pt x="3679602" y="2530634"/>
+                  </a:lnTo>
+                  <a:lnTo>
+                    <a:pt x="3751224" y="2523687"/>
+                  </a:lnTo>
+                  <a:lnTo>
+                    <a:pt x="3822847" y="2516689"/>
+                  </a:lnTo>
+                  <a:lnTo>
+                    <a:pt x="3894469" y="2509640"/>
+                  </a:lnTo>
+                  <a:lnTo>
+                    <a:pt x="3966092" y="2502540"/>
+                  </a:lnTo>
+                  <a:lnTo>
+                    <a:pt x="4037714" y="2495388"/>
+                  </a:lnTo>
+                  <a:lnTo>
+                    <a:pt x="4109337" y="2488184"/>
+                  </a:lnTo>
+                  <a:lnTo>
+                    <a:pt x="4180959" y="2480927"/>
+                  </a:lnTo>
+                  <a:lnTo>
+                    <a:pt x="4252582" y="2473618"/>
+                  </a:lnTo>
+                  <a:lnTo>
+                    <a:pt x="4324204" y="2466255"/>
+                  </a:lnTo>
+                  <a:lnTo>
+                    <a:pt x="4395827" y="2458839"/>
+                  </a:lnTo>
+                  <a:lnTo>
+                    <a:pt x="4467449" y="2451368"/>
+                  </a:lnTo>
+                  <a:lnTo>
+                    <a:pt x="4539072" y="2443843"/>
+                  </a:lnTo>
+                  <a:lnTo>
+                    <a:pt x="4610694" y="2436264"/>
+                  </a:lnTo>
+                  <a:lnTo>
+                    <a:pt x="4682317" y="2428628"/>
+                  </a:lnTo>
+                  <a:lnTo>
+                    <a:pt x="4753940" y="2420938"/>
+                  </a:lnTo>
+                  <a:lnTo>
+                    <a:pt x="4825562" y="2413191"/>
+                  </a:lnTo>
+                  <a:lnTo>
+                    <a:pt x="4897185" y="2405388"/>
+                  </a:lnTo>
+                  <a:lnTo>
+                    <a:pt x="4968807" y="2397528"/>
+                  </a:lnTo>
+                  <a:lnTo>
+                    <a:pt x="5040430" y="2389610"/>
+                  </a:lnTo>
+                  <a:lnTo>
+                    <a:pt x="5112052" y="2381635"/>
+                  </a:lnTo>
+                  <a:lnTo>
+                    <a:pt x="5183675" y="2373602"/>
+                  </a:lnTo>
+                  <a:lnTo>
+                    <a:pt x="5255297" y="2365510"/>
+                  </a:lnTo>
+                  <a:lnTo>
+                    <a:pt x="5326920" y="2357359"/>
+                  </a:lnTo>
+                  <a:lnTo>
+                    <a:pt x="5398542" y="2349149"/>
+                  </a:lnTo>
+                  <a:lnTo>
+                    <a:pt x="5470165" y="2340879"/>
+                  </a:lnTo>
+                  <a:lnTo>
+                    <a:pt x="5541787" y="2332549"/>
+                  </a:lnTo>
+                  <a:lnTo>
+                    <a:pt x="5613410" y="2324158"/>
+                  </a:lnTo>
+                  <a:lnTo>
+                    <a:pt x="5685032" y="2315706"/>
+                  </a:lnTo>
+                  <a:lnTo>
+                    <a:pt x="5756655" y="2307192"/>
+                  </a:lnTo>
+                  <a:lnTo>
+                    <a:pt x="5828277" y="2298616"/>
+                  </a:lnTo>
+                  <a:lnTo>
+                    <a:pt x="5899900" y="2289978"/>
+                  </a:lnTo>
+                  <a:lnTo>
+                    <a:pt x="5971522" y="2281277"/>
+                  </a:lnTo>
+                  <a:lnTo>
+                    <a:pt x="6043145" y="2272512"/>
+                  </a:lnTo>
+                  <a:lnTo>
+                    <a:pt x="6114768" y="2263683"/>
+                  </a:lnTo>
+                  <a:lnTo>
+                    <a:pt x="6186390" y="2254790"/>
+                  </a:lnTo>
+                  <a:lnTo>
+                    <a:pt x="6258013" y="2245832"/>
                   </a:lnTo>
                 </a:path>
               </a:pathLst>
@@ -3892,312 +3892,312 @@
           </p:nvSpPr>
           <p:spPr>
             <a:xfrm>
-              <a:off x="1172049" y="4732777"/>
-              <a:ext cx="7090630" cy="752799"/>
+              <a:off x="1172049" y="4732681"/>
+              <a:ext cx="7090630" cy="753245"/>
             </a:xfrm>
             <a:custGeom>
               <a:avLst/>
               <a:pathLst>
-                <a:path w="7090630" h="752799">
+                <a:path w="7090630" h="753245">
                   <a:moveTo>
-                    <a:pt x="7090630" y="752799"/>
+                    <a:pt x="7090630" y="753245"/>
                   </a:moveTo>
                   <a:lnTo>
-                    <a:pt x="7019007" y="749544"/>
-                  </a:lnTo>
-                  <a:lnTo>
-                    <a:pt x="6947385" y="746141"/>
-                  </a:lnTo>
-                  <a:lnTo>
-                    <a:pt x="6875762" y="742584"/>
-                  </a:lnTo>
-                  <a:lnTo>
-                    <a:pt x="6804139" y="738865"/>
-                  </a:lnTo>
-                  <a:lnTo>
-                    <a:pt x="6732517" y="734978"/>
-                  </a:lnTo>
-                  <a:lnTo>
-                    <a:pt x="6660894" y="730914"/>
-                  </a:lnTo>
-                  <a:lnTo>
-                    <a:pt x="6589272" y="726665"/>
-                  </a:lnTo>
-                  <a:lnTo>
-                    <a:pt x="6517649" y="722224"/>
-                  </a:lnTo>
-                  <a:lnTo>
-                    <a:pt x="6446027" y="717580"/>
-                  </a:lnTo>
-                  <a:lnTo>
-                    <a:pt x="6374404" y="712726"/>
-                  </a:lnTo>
-                  <a:lnTo>
-                    <a:pt x="6302782" y="707652"/>
-                  </a:lnTo>
-                  <a:lnTo>
-                    <a:pt x="6231159" y="702347"/>
-                  </a:lnTo>
-                  <a:lnTo>
-                    <a:pt x="6159537" y="696801"/>
-                  </a:lnTo>
-                  <a:lnTo>
-                    <a:pt x="6087914" y="691003"/>
-                  </a:lnTo>
-                  <a:lnTo>
-                    <a:pt x="6016292" y="684942"/>
-                  </a:lnTo>
-                  <a:lnTo>
-                    <a:pt x="5944669" y="678606"/>
-                  </a:lnTo>
-                  <a:lnTo>
-                    <a:pt x="5873047" y="671981"/>
-                  </a:lnTo>
-                  <a:lnTo>
-                    <a:pt x="5801424" y="665057"/>
-                  </a:lnTo>
-                  <a:lnTo>
-                    <a:pt x="5729802" y="657817"/>
-                  </a:lnTo>
-                  <a:lnTo>
-                    <a:pt x="5658179" y="650249"/>
-                  </a:lnTo>
-                  <a:lnTo>
-                    <a:pt x="5586557" y="642337"/>
-                  </a:lnTo>
-                  <a:lnTo>
-                    <a:pt x="5514934" y="634066"/>
-                  </a:lnTo>
-                  <a:lnTo>
-                    <a:pt x="5443311" y="625420"/>
-                  </a:lnTo>
-                  <a:lnTo>
-                    <a:pt x="5371689" y="616380"/>
-                  </a:lnTo>
-                  <a:lnTo>
-                    <a:pt x="5300066" y="606931"/>
-                  </a:lnTo>
-                  <a:lnTo>
-                    <a:pt x="5228444" y="597052"/>
-                  </a:lnTo>
-                  <a:lnTo>
-                    <a:pt x="5156821" y="586724"/>
-                  </a:lnTo>
-                  <a:lnTo>
-                    <a:pt x="5085199" y="575928"/>
-                  </a:lnTo>
-                  <a:lnTo>
-                    <a:pt x="5013576" y="564641"/>
-                  </a:lnTo>
-                  <a:lnTo>
-                    <a:pt x="4941954" y="552841"/>
-                  </a:lnTo>
-                  <a:lnTo>
-                    <a:pt x="4870331" y="540506"/>
-                  </a:lnTo>
-                  <a:lnTo>
-                    <a:pt x="4798709" y="527611"/>
-                  </a:lnTo>
-                  <a:lnTo>
-                    <a:pt x="4727086" y="514130"/>
-                  </a:lnTo>
-                  <a:lnTo>
-                    <a:pt x="4655464" y="500036"/>
-                  </a:lnTo>
-                  <a:lnTo>
-                    <a:pt x="4583841" y="485303"/>
-                  </a:lnTo>
-                  <a:lnTo>
-                    <a:pt x="4512219" y="469901"/>
-                  </a:lnTo>
-                  <a:lnTo>
-                    <a:pt x="4440596" y="453799"/>
-                  </a:lnTo>
-                  <a:lnTo>
-                    <a:pt x="4368974" y="436966"/>
-                  </a:lnTo>
-                  <a:lnTo>
-                    <a:pt x="4297351" y="419369"/>
-                  </a:lnTo>
-                  <a:lnTo>
-                    <a:pt x="4225729" y="400972"/>
-                  </a:lnTo>
-                  <a:lnTo>
-                    <a:pt x="4154106" y="381741"/>
-                  </a:lnTo>
-                  <a:lnTo>
-                    <a:pt x="4082483" y="361635"/>
-                  </a:lnTo>
-                  <a:lnTo>
-                    <a:pt x="4010861" y="340617"/>
-                  </a:lnTo>
-                  <a:lnTo>
-                    <a:pt x="3939238" y="318644"/>
-                  </a:lnTo>
-                  <a:lnTo>
-                    <a:pt x="3867616" y="295674"/>
-                  </a:lnTo>
-                  <a:lnTo>
-                    <a:pt x="3795993" y="271660"/>
-                  </a:lnTo>
-                  <a:lnTo>
-                    <a:pt x="3724371" y="246556"/>
-                  </a:lnTo>
-                  <a:lnTo>
-                    <a:pt x="3652748" y="220312"/>
-                  </a:lnTo>
-                  <a:lnTo>
-                    <a:pt x="3581126" y="192876"/>
-                  </a:lnTo>
-                  <a:lnTo>
-                    <a:pt x="3509503" y="164194"/>
-                  </a:lnTo>
-                  <a:lnTo>
-                    <a:pt x="3437881" y="134209"/>
-                  </a:lnTo>
-                  <a:lnTo>
-                    <a:pt x="3366258" y="102863"/>
-                  </a:lnTo>
-                  <a:lnTo>
-                    <a:pt x="3294636" y="70093"/>
-                  </a:lnTo>
-                  <a:lnTo>
-                    <a:pt x="3223013" y="35836"/>
-                  </a:lnTo>
-                  <a:lnTo>
-                    <a:pt x="3151391" y="22"/>
-                  </a:lnTo>
-                  <a:lnTo>
-                    <a:pt x="3079768" y="0"/>
-                  </a:lnTo>
-                  <a:lnTo>
-                    <a:pt x="3008146" y="5743"/>
-                  </a:lnTo>
-                  <a:lnTo>
-                    <a:pt x="2936523" y="11446"/>
-                  </a:lnTo>
-                  <a:lnTo>
-                    <a:pt x="2864901" y="17109"/>
-                  </a:lnTo>
-                  <a:lnTo>
-                    <a:pt x="2793278" y="22733"/>
-                  </a:lnTo>
-                  <a:lnTo>
-                    <a:pt x="2721655" y="28318"/>
-                  </a:lnTo>
-                  <a:lnTo>
-                    <a:pt x="2650033" y="33864"/>
-                  </a:lnTo>
-                  <a:lnTo>
-                    <a:pt x="2578410" y="39371"/>
-                  </a:lnTo>
-                  <a:lnTo>
-                    <a:pt x="2506788" y="44840"/>
-                  </a:lnTo>
-                  <a:lnTo>
-                    <a:pt x="2435165" y="50271"/>
-                  </a:lnTo>
-                  <a:lnTo>
-                    <a:pt x="2363543" y="55664"/>
-                  </a:lnTo>
-                  <a:lnTo>
-                    <a:pt x="2291920" y="61020"/>
-                  </a:lnTo>
-                  <a:lnTo>
-                    <a:pt x="2220298" y="66338"/>
-                  </a:lnTo>
-                  <a:lnTo>
-                    <a:pt x="2148675" y="71619"/>
-                  </a:lnTo>
-                  <a:lnTo>
-                    <a:pt x="2077053" y="76863"/>
-                  </a:lnTo>
-                  <a:lnTo>
-                    <a:pt x="2005430" y="82071"/>
-                  </a:lnTo>
-                  <a:lnTo>
-                    <a:pt x="1933808" y="87243"/>
-                  </a:lnTo>
-                  <a:lnTo>
-                    <a:pt x="1862185" y="92378"/>
-                  </a:lnTo>
-                  <a:lnTo>
-                    <a:pt x="1790563" y="97478"/>
-                  </a:lnTo>
-                  <a:lnTo>
-                    <a:pt x="1718940" y="102542"/>
-                  </a:lnTo>
-                  <a:lnTo>
-                    <a:pt x="1647318" y="107571"/>
-                  </a:lnTo>
-                  <a:lnTo>
-                    <a:pt x="1575695" y="112565"/>
-                  </a:lnTo>
-                  <a:lnTo>
-                    <a:pt x="1504073" y="117524"/>
-                  </a:lnTo>
-                  <a:lnTo>
-                    <a:pt x="1432450" y="122448"/>
-                  </a:lnTo>
-                  <a:lnTo>
-                    <a:pt x="1360827" y="127339"/>
-                  </a:lnTo>
-                  <a:lnTo>
-                    <a:pt x="1289205" y="132195"/>
-                  </a:lnTo>
-                  <a:lnTo>
-                    <a:pt x="1217582" y="137017"/>
-                  </a:lnTo>
-                  <a:lnTo>
-                    <a:pt x="1145960" y="141806"/>
-                  </a:lnTo>
-                  <a:lnTo>
-                    <a:pt x="1074337" y="146561"/>
-                  </a:lnTo>
-                  <a:lnTo>
-                    <a:pt x="1002715" y="151283"/>
-                  </a:lnTo>
-                  <a:lnTo>
-                    <a:pt x="931092" y="155973"/>
-                  </a:lnTo>
-                  <a:lnTo>
-                    <a:pt x="859470" y="160630"/>
-                  </a:lnTo>
-                  <a:lnTo>
-                    <a:pt x="787847" y="165254"/>
-                  </a:lnTo>
-                  <a:lnTo>
-                    <a:pt x="716225" y="169846"/>
-                  </a:lnTo>
-                  <a:lnTo>
-                    <a:pt x="644602" y="174406"/>
-                  </a:lnTo>
-                  <a:lnTo>
-                    <a:pt x="572980" y="178934"/>
-                  </a:lnTo>
-                  <a:lnTo>
-                    <a:pt x="501357" y="183431"/>
-                  </a:lnTo>
-                  <a:lnTo>
-                    <a:pt x="429735" y="187896"/>
-                  </a:lnTo>
-                  <a:lnTo>
-                    <a:pt x="358112" y="192331"/>
-                  </a:lnTo>
-                  <a:lnTo>
-                    <a:pt x="286490" y="196734"/>
-                  </a:lnTo>
-                  <a:lnTo>
-                    <a:pt x="214867" y="201107"/>
-                  </a:lnTo>
-                  <a:lnTo>
-                    <a:pt x="143245" y="205449"/>
-                  </a:lnTo>
-                  <a:lnTo>
-                    <a:pt x="71622" y="209761"/>
-                  </a:lnTo>
-                  <a:lnTo>
-                    <a:pt x="0" y="214043"/>
+                    <a:pt x="7019007" y="750000"/>
+                  </a:lnTo>
+                  <a:lnTo>
+                    <a:pt x="6947385" y="746606"/>
+                  </a:lnTo>
+                  <a:lnTo>
+                    <a:pt x="6875762" y="743058"/>
+                  </a:lnTo>
+                  <a:lnTo>
+                    <a:pt x="6804139" y="739349"/>
+                  </a:lnTo>
+                  <a:lnTo>
+                    <a:pt x="6732517" y="735471"/>
+                  </a:lnTo>
+                  <a:lnTo>
+                    <a:pt x="6660894" y="731416"/>
+                  </a:lnTo>
+                  <a:lnTo>
+                    <a:pt x="6589272" y="727177"/>
+                  </a:lnTo>
+                  <a:lnTo>
+                    <a:pt x="6517649" y="722745"/>
+                  </a:lnTo>
+                  <a:lnTo>
+                    <a:pt x="6446027" y="718111"/>
+                  </a:lnTo>
+                  <a:lnTo>
+                    <a:pt x="6374404" y="713267"/>
+                  </a:lnTo>
+                  <a:lnTo>
+                    <a:pt x="6302782" y="708202"/>
+                  </a:lnTo>
+                  <a:lnTo>
+                    <a:pt x="6231159" y="702906"/>
+                  </a:lnTo>
+                  <a:lnTo>
+                    <a:pt x="6159537" y="697370"/>
+                  </a:lnTo>
+                  <a:lnTo>
+                    <a:pt x="6087914" y="691581"/>
+                  </a:lnTo>
+                  <a:lnTo>
+                    <a:pt x="6016292" y="685529"/>
+                  </a:lnTo>
+                  <a:lnTo>
+                    <a:pt x="5944669" y="679202"/>
+                  </a:lnTo>
+                  <a:lnTo>
+                    <a:pt x="5873047" y="672587"/>
+                  </a:lnTo>
+                  <a:lnTo>
+                    <a:pt x="5801424" y="665670"/>
+                  </a:lnTo>
+                  <a:lnTo>
+                    <a:pt x="5729802" y="658439"/>
+                  </a:lnTo>
+                  <a:lnTo>
+                    <a:pt x="5658179" y="650879"/>
+                  </a:lnTo>
+                  <a:lnTo>
+                    <a:pt x="5586557" y="642975"/>
+                  </a:lnTo>
+                  <a:lnTo>
+                    <a:pt x="5514934" y="634711"/>
+                  </a:lnTo>
+                  <a:lnTo>
+                    <a:pt x="5443311" y="626071"/>
+                  </a:lnTo>
+                  <a:lnTo>
+                    <a:pt x="5371689" y="617038"/>
+                  </a:lnTo>
+                  <a:lnTo>
+                    <a:pt x="5300066" y="607593"/>
+                  </a:lnTo>
+                  <a:lnTo>
+                    <a:pt x="5228444" y="597719"/>
+                  </a:lnTo>
+                  <a:lnTo>
+                    <a:pt x="5156821" y="587396"/>
+                  </a:lnTo>
+                  <a:lnTo>
+                    <a:pt x="5085199" y="576603"/>
+                  </a:lnTo>
+                  <a:lnTo>
+                    <a:pt x="5013576" y="565319"/>
+                  </a:lnTo>
+                  <a:lnTo>
+                    <a:pt x="4941954" y="553521"/>
+                  </a:lnTo>
+                  <a:lnTo>
+                    <a:pt x="4870331" y="541186"/>
+                  </a:lnTo>
+                  <a:lnTo>
+                    <a:pt x="4798709" y="528290"/>
+                  </a:lnTo>
+                  <a:lnTo>
+                    <a:pt x="4727086" y="514807"/>
+                  </a:lnTo>
+                  <a:lnTo>
+                    <a:pt x="4655464" y="500710"/>
+                  </a:lnTo>
+                  <a:lnTo>
+                    <a:pt x="4583841" y="485972"/>
+                  </a:lnTo>
+                  <a:lnTo>
+                    <a:pt x="4512219" y="470564"/>
+                  </a:lnTo>
+                  <a:lnTo>
+                    <a:pt x="4440596" y="454454"/>
+                  </a:lnTo>
+                  <a:lnTo>
+                    <a:pt x="4368974" y="437611"/>
+                  </a:lnTo>
+                  <a:lnTo>
+                    <a:pt x="4297351" y="420001"/>
+                  </a:lnTo>
+                  <a:lnTo>
+                    <a:pt x="4225729" y="401590"/>
+                  </a:lnTo>
+                  <a:lnTo>
+                    <a:pt x="4154106" y="382341"/>
+                  </a:lnTo>
+                  <a:lnTo>
+                    <a:pt x="4082483" y="362216"/>
+                  </a:lnTo>
+                  <a:lnTo>
+                    <a:pt x="4010861" y="341176"/>
+                  </a:lnTo>
+                  <a:lnTo>
+                    <a:pt x="3939238" y="319178"/>
+                  </a:lnTo>
+                  <a:lnTo>
+                    <a:pt x="3867616" y="296179"/>
+                  </a:lnTo>
+                  <a:lnTo>
+                    <a:pt x="3795993" y="272133"/>
+                  </a:lnTo>
+                  <a:lnTo>
+                    <a:pt x="3724371" y="246993"/>
+                  </a:lnTo>
+                  <a:lnTo>
+                    <a:pt x="3652748" y="220709"/>
+                  </a:lnTo>
+                  <a:lnTo>
+                    <a:pt x="3581126" y="193228"/>
+                  </a:lnTo>
+                  <a:lnTo>
+                    <a:pt x="3509503" y="164497"/>
+                  </a:lnTo>
+                  <a:lnTo>
+                    <a:pt x="3437881" y="134459"/>
+                  </a:lnTo>
+                  <a:lnTo>
+                    <a:pt x="3366258" y="103054"/>
+                  </a:lnTo>
+                  <a:lnTo>
+                    <a:pt x="3294636" y="70219"/>
+                  </a:lnTo>
+                  <a:lnTo>
+                    <a:pt x="3223013" y="35890"/>
+                  </a:lnTo>
+                  <a:lnTo>
+                    <a:pt x="3151391" y="0"/>
+                  </a:lnTo>
+                  <a:lnTo>
+                    <a:pt x="3079768" y="311"/>
+                  </a:lnTo>
+                  <a:lnTo>
+                    <a:pt x="3008146" y="6275"/>
+                  </a:lnTo>
+                  <a:lnTo>
+                    <a:pt x="2936523" y="12197"/>
+                  </a:lnTo>
+                  <a:lnTo>
+                    <a:pt x="2864901" y="18075"/>
+                  </a:lnTo>
+                  <a:lnTo>
+                    <a:pt x="2793278" y="23911"/>
+                  </a:lnTo>
+                  <a:lnTo>
+                    <a:pt x="2721655" y="29705"/>
+                  </a:lnTo>
+                  <a:lnTo>
+                    <a:pt x="2650033" y="35457"/>
+                  </a:lnTo>
+                  <a:lnTo>
+                    <a:pt x="2578410" y="41167"/>
+                  </a:lnTo>
+                  <a:lnTo>
+                    <a:pt x="2506788" y="46836"/>
+                  </a:lnTo>
+                  <a:lnTo>
+                    <a:pt x="2435165" y="52464"/>
+                  </a:lnTo>
+                  <a:lnTo>
+                    <a:pt x="2363543" y="58051"/>
+                  </a:lnTo>
+                  <a:lnTo>
+                    <a:pt x="2291920" y="63597"/>
+                  </a:lnTo>
+                  <a:lnTo>
+                    <a:pt x="2220298" y="69104"/>
+                  </a:lnTo>
+                  <a:lnTo>
+                    <a:pt x="2148675" y="74571"/>
+                  </a:lnTo>
+                  <a:lnTo>
+                    <a:pt x="2077053" y="79998"/>
+                  </a:lnTo>
+                  <a:lnTo>
+                    <a:pt x="2005430" y="85386"/>
+                  </a:lnTo>
+                  <a:lnTo>
+                    <a:pt x="1933808" y="90734"/>
+                  </a:lnTo>
+                  <a:lnTo>
+                    <a:pt x="1862185" y="96045"/>
+                  </a:lnTo>
+                  <a:lnTo>
+                    <a:pt x="1790563" y="101316"/>
+                  </a:lnTo>
+                  <a:lnTo>
+                    <a:pt x="1718940" y="106550"/>
+                  </a:lnTo>
+                  <a:lnTo>
+                    <a:pt x="1647318" y="111746"/>
+                  </a:lnTo>
+                  <a:lnTo>
+                    <a:pt x="1575695" y="116904"/>
+                  </a:lnTo>
+                  <a:lnTo>
+                    <a:pt x="1504073" y="122025"/>
+                  </a:lnTo>
+                  <a:lnTo>
+                    <a:pt x="1432450" y="127108"/>
+                  </a:lnTo>
+                  <a:lnTo>
+                    <a:pt x="1360827" y="132155"/>
+                  </a:lnTo>
+                  <a:lnTo>
+                    <a:pt x="1289205" y="137166"/>
+                  </a:lnTo>
+                  <a:lnTo>
+                    <a:pt x="1217582" y="142140"/>
+                  </a:lnTo>
+                  <a:lnTo>
+                    <a:pt x="1145960" y="147078"/>
+                  </a:lnTo>
+                  <a:lnTo>
+                    <a:pt x="1074337" y="151981"/>
+                  </a:lnTo>
+                  <a:lnTo>
+                    <a:pt x="1002715" y="156847"/>
+                  </a:lnTo>
+                  <a:lnTo>
+                    <a:pt x="931092" y="161679"/>
+                  </a:lnTo>
+                  <a:lnTo>
+                    <a:pt x="859470" y="166476"/>
+                  </a:lnTo>
+                  <a:lnTo>
+                    <a:pt x="787847" y="171238"/>
+                  </a:lnTo>
+                  <a:lnTo>
+                    <a:pt x="716225" y="175966"/>
+                  </a:lnTo>
+                  <a:lnTo>
+                    <a:pt x="644602" y="180659"/>
+                  </a:lnTo>
+                  <a:lnTo>
+                    <a:pt x="572980" y="185319"/>
+                  </a:lnTo>
+                  <a:lnTo>
+                    <a:pt x="501357" y="189944"/>
+                  </a:lnTo>
+                  <a:lnTo>
+                    <a:pt x="429735" y="194537"/>
+                  </a:lnTo>
+                  <a:lnTo>
+                    <a:pt x="358112" y="199096"/>
+                  </a:lnTo>
+                  <a:lnTo>
+                    <a:pt x="286490" y="203622"/>
+                  </a:lnTo>
+                  <a:lnTo>
+                    <a:pt x="214867" y="208115"/>
+                  </a:lnTo>
+                  <a:lnTo>
+                    <a:pt x="143245" y="212576"/>
+                  </a:lnTo>
+                  <a:lnTo>
+                    <a:pt x="71622" y="217004"/>
+                  </a:lnTo>
+                  <a:lnTo>
+                    <a:pt x="0" y="221401"/>
                   </a:lnTo>
                 </a:path>
               </a:pathLst>
@@ -4217,312 +4217,312 @@
           </p:nvSpPr>
           <p:spPr>
             <a:xfrm>
-              <a:off x="1172049" y="3672634"/>
-              <a:ext cx="7090630" cy="1588971"/>
+              <a:off x="1172049" y="3679957"/>
+              <a:ext cx="7090630" cy="1580154"/>
             </a:xfrm>
             <a:custGeom>
               <a:avLst/>
               <a:pathLst>
-                <a:path w="7090630" h="1588971">
+                <a:path w="7090630" h="1580154">
                   <a:moveTo>
                     <a:pt x="0" y="0"/>
                   </a:moveTo>
                   <a:lnTo>
-                    <a:pt x="71622" y="34933"/>
-                  </a:lnTo>
-                  <a:lnTo>
-                    <a:pt x="143245" y="69220"/>
-                  </a:lnTo>
-                  <a:lnTo>
-                    <a:pt x="214867" y="102871"/>
-                  </a:lnTo>
-                  <a:lnTo>
-                    <a:pt x="286490" y="135898"/>
-                  </a:lnTo>
-                  <a:lnTo>
-                    <a:pt x="358112" y="168313"/>
-                  </a:lnTo>
-                  <a:lnTo>
-                    <a:pt x="429735" y="200127"/>
-                  </a:lnTo>
-                  <a:lnTo>
-                    <a:pt x="501357" y="231351"/>
-                  </a:lnTo>
-                  <a:lnTo>
-                    <a:pt x="572980" y="261997"/>
-                  </a:lnTo>
-                  <a:lnTo>
-                    <a:pt x="644602" y="292074"/>
-                  </a:lnTo>
-                  <a:lnTo>
-                    <a:pt x="716225" y="321594"/>
-                  </a:lnTo>
-                  <a:lnTo>
-                    <a:pt x="787847" y="350567"/>
-                  </a:lnTo>
-                  <a:lnTo>
-                    <a:pt x="859470" y="379002"/>
-                  </a:lnTo>
-                  <a:lnTo>
-                    <a:pt x="931092" y="406911"/>
-                  </a:lnTo>
-                  <a:lnTo>
-                    <a:pt x="1002715" y="434302"/>
-                  </a:lnTo>
-                  <a:lnTo>
-                    <a:pt x="1074337" y="461186"/>
-                  </a:lnTo>
-                  <a:lnTo>
-                    <a:pt x="1145960" y="487571"/>
-                  </a:lnTo>
-                  <a:lnTo>
-                    <a:pt x="1217582" y="513467"/>
-                  </a:lnTo>
-                  <a:lnTo>
-                    <a:pt x="1289205" y="538883"/>
-                  </a:lnTo>
-                  <a:lnTo>
-                    <a:pt x="1360827" y="563828"/>
-                  </a:lnTo>
-                  <a:lnTo>
-                    <a:pt x="1432450" y="588311"/>
-                  </a:lnTo>
-                  <a:lnTo>
-                    <a:pt x="1504073" y="612340"/>
-                  </a:lnTo>
-                  <a:lnTo>
-                    <a:pt x="1575695" y="635923"/>
-                  </a:lnTo>
-                  <a:lnTo>
-                    <a:pt x="1647318" y="659069"/>
-                  </a:lnTo>
-                  <a:lnTo>
-                    <a:pt x="1718940" y="681786"/>
-                  </a:lnTo>
-                  <a:lnTo>
-                    <a:pt x="1790563" y="704083"/>
-                  </a:lnTo>
-                  <a:lnTo>
-                    <a:pt x="1862185" y="725965"/>
-                  </a:lnTo>
-                  <a:lnTo>
-                    <a:pt x="1933808" y="747443"/>
-                  </a:lnTo>
-                  <a:lnTo>
-                    <a:pt x="2005430" y="768522"/>
-                  </a:lnTo>
-                  <a:lnTo>
-                    <a:pt x="2077053" y="789210"/>
-                  </a:lnTo>
-                  <a:lnTo>
-                    <a:pt x="2148675" y="809515"/>
-                  </a:lnTo>
-                  <a:lnTo>
-                    <a:pt x="2220298" y="829443"/>
-                  </a:lnTo>
-                  <a:lnTo>
-                    <a:pt x="2291920" y="849002"/>
-                  </a:lnTo>
-                  <a:lnTo>
-                    <a:pt x="2363543" y="868199"/>
-                  </a:lnTo>
-                  <a:lnTo>
-                    <a:pt x="2435165" y="887039"/>
-                  </a:lnTo>
-                  <a:lnTo>
-                    <a:pt x="2506788" y="905531"/>
-                  </a:lnTo>
-                  <a:lnTo>
-                    <a:pt x="2578410" y="923680"/>
-                  </a:lnTo>
-                  <a:lnTo>
-                    <a:pt x="2650033" y="941492"/>
-                  </a:lnTo>
-                  <a:lnTo>
-                    <a:pt x="2721655" y="958974"/>
-                  </a:lnTo>
-                  <a:lnTo>
-                    <a:pt x="2793278" y="976132"/>
-                  </a:lnTo>
-                  <a:lnTo>
-                    <a:pt x="2864901" y="992972"/>
-                  </a:lnTo>
-                  <a:lnTo>
-                    <a:pt x="2936523" y="1009500"/>
-                  </a:lnTo>
-                  <a:lnTo>
-                    <a:pt x="3008146" y="1025721"/>
-                  </a:lnTo>
-                  <a:lnTo>
-                    <a:pt x="3079768" y="1041642"/>
-                  </a:lnTo>
-                  <a:lnTo>
-                    <a:pt x="3151391" y="1057268"/>
-                  </a:lnTo>
-                  <a:lnTo>
-                    <a:pt x="3223013" y="1072604"/>
-                  </a:lnTo>
-                  <a:lnTo>
-                    <a:pt x="3294636" y="1087656"/>
-                  </a:lnTo>
-                  <a:lnTo>
-                    <a:pt x="3366258" y="1102428"/>
-                  </a:lnTo>
-                  <a:lnTo>
-                    <a:pt x="3437881" y="1116927"/>
-                  </a:lnTo>
-                  <a:lnTo>
-                    <a:pt x="3509503" y="1131157"/>
-                  </a:lnTo>
-                  <a:lnTo>
-                    <a:pt x="3581126" y="1145124"/>
-                  </a:lnTo>
-                  <a:lnTo>
-                    <a:pt x="3652748" y="1158831"/>
-                  </a:lnTo>
-                  <a:lnTo>
-                    <a:pt x="3724371" y="1172285"/>
-                  </a:lnTo>
-                  <a:lnTo>
-                    <a:pt x="3795993" y="1185489"/>
-                  </a:lnTo>
-                  <a:lnTo>
-                    <a:pt x="3867616" y="1198448"/>
-                  </a:lnTo>
-                  <a:lnTo>
-                    <a:pt x="3939238" y="1211167"/>
-                  </a:lnTo>
-                  <a:lnTo>
-                    <a:pt x="4010861" y="1223650"/>
-                  </a:lnTo>
-                  <a:lnTo>
-                    <a:pt x="4082483" y="1235902"/>
-                  </a:lnTo>
-                  <a:lnTo>
-                    <a:pt x="4154106" y="1247927"/>
-                  </a:lnTo>
-                  <a:lnTo>
-                    <a:pt x="4225729" y="1259729"/>
-                  </a:lnTo>
-                  <a:lnTo>
-                    <a:pt x="4297351" y="1271312"/>
-                  </a:lnTo>
-                  <a:lnTo>
-                    <a:pt x="4368974" y="1282680"/>
-                  </a:lnTo>
-                  <a:lnTo>
-                    <a:pt x="4440596" y="1293838"/>
-                  </a:lnTo>
-                  <a:lnTo>
-                    <a:pt x="4512219" y="1304789"/>
-                  </a:lnTo>
-                  <a:lnTo>
-                    <a:pt x="4583841" y="1315537"/>
-                  </a:lnTo>
-                  <a:lnTo>
-                    <a:pt x="4655464" y="1326085"/>
-                  </a:lnTo>
-                  <a:lnTo>
-                    <a:pt x="4727086" y="1336439"/>
-                  </a:lnTo>
-                  <a:lnTo>
-                    <a:pt x="4798709" y="1346600"/>
-                  </a:lnTo>
-                  <a:lnTo>
-                    <a:pt x="4870331" y="1356573"/>
-                  </a:lnTo>
-                  <a:lnTo>
-                    <a:pt x="4941954" y="1366361"/>
-                  </a:lnTo>
-                  <a:lnTo>
-                    <a:pt x="5013576" y="1375967"/>
-                  </a:lnTo>
-                  <a:lnTo>
-                    <a:pt x="5085199" y="1385396"/>
-                  </a:lnTo>
-                  <a:lnTo>
-                    <a:pt x="5156821" y="1394649"/>
-                  </a:lnTo>
-                  <a:lnTo>
-                    <a:pt x="5228444" y="1403732"/>
-                  </a:lnTo>
-                  <a:lnTo>
-                    <a:pt x="5300066" y="1412645"/>
-                  </a:lnTo>
-                  <a:lnTo>
-                    <a:pt x="5371689" y="1421394"/>
-                  </a:lnTo>
-                  <a:lnTo>
-                    <a:pt x="5443311" y="1429980"/>
-                  </a:lnTo>
-                  <a:lnTo>
-                    <a:pt x="5514934" y="1438408"/>
-                  </a:lnTo>
-                  <a:lnTo>
-                    <a:pt x="5586557" y="1446679"/>
-                  </a:lnTo>
-                  <a:lnTo>
-                    <a:pt x="5658179" y="1454797"/>
-                  </a:lnTo>
-                  <a:lnTo>
-                    <a:pt x="5729802" y="1462764"/>
-                  </a:lnTo>
-                  <a:lnTo>
-                    <a:pt x="5801424" y="1470583"/>
-                  </a:lnTo>
-                  <a:lnTo>
-                    <a:pt x="5873047" y="1478258"/>
-                  </a:lnTo>
-                  <a:lnTo>
-                    <a:pt x="5944669" y="1485790"/>
-                  </a:lnTo>
-                  <a:lnTo>
-                    <a:pt x="6016292" y="1493183"/>
-                  </a:lnTo>
-                  <a:lnTo>
-                    <a:pt x="6087914" y="1500439"/>
-                  </a:lnTo>
-                  <a:lnTo>
-                    <a:pt x="6159537" y="1507560"/>
-                  </a:lnTo>
-                  <a:lnTo>
-                    <a:pt x="6231159" y="1514549"/>
-                  </a:lnTo>
-                  <a:lnTo>
-                    <a:pt x="6302782" y="1521409"/>
-                  </a:lnTo>
-                  <a:lnTo>
-                    <a:pt x="6374404" y="1528142"/>
-                  </a:lnTo>
-                  <a:lnTo>
-                    <a:pt x="6446027" y="1534749"/>
-                  </a:lnTo>
-                  <a:lnTo>
-                    <a:pt x="6517649" y="1541235"/>
-                  </a:lnTo>
-                  <a:lnTo>
-                    <a:pt x="6589272" y="1547600"/>
-                  </a:lnTo>
-                  <a:lnTo>
-                    <a:pt x="6660894" y="1553847"/>
-                  </a:lnTo>
-                  <a:lnTo>
-                    <a:pt x="6732517" y="1559978"/>
-                  </a:lnTo>
-                  <a:lnTo>
-                    <a:pt x="6804139" y="1565996"/>
-                  </a:lnTo>
-                  <a:lnTo>
-                    <a:pt x="6875762" y="1571902"/>
-                  </a:lnTo>
-                  <a:lnTo>
-                    <a:pt x="6947385" y="1577698"/>
-                  </a:lnTo>
-                  <a:lnTo>
-                    <a:pt x="7019007" y="1583387"/>
-                  </a:lnTo>
-                  <a:lnTo>
-                    <a:pt x="7090630" y="1588971"/>
+                    <a:pt x="71622" y="34631"/>
+                  </a:lnTo>
+                  <a:lnTo>
+                    <a:pt x="143245" y="68624"/>
+                  </a:lnTo>
+                  <a:lnTo>
+                    <a:pt x="214867" y="101990"/>
+                  </a:lnTo>
+                  <a:lnTo>
+                    <a:pt x="286490" y="134741"/>
+                  </a:lnTo>
+                  <a:lnTo>
+                    <a:pt x="358112" y="166887"/>
+                  </a:lnTo>
+                  <a:lnTo>
+                    <a:pt x="429735" y="198440"/>
+                  </a:lnTo>
+                  <a:lnTo>
+                    <a:pt x="501357" y="229411"/>
+                  </a:lnTo>
+                  <a:lnTo>
+                    <a:pt x="572980" y="259811"/>
+                  </a:lnTo>
+                  <a:lnTo>
+                    <a:pt x="644602" y="289650"/>
+                  </a:lnTo>
+                  <a:lnTo>
+                    <a:pt x="716225" y="318939"/>
+                  </a:lnTo>
+                  <a:lnTo>
+                    <a:pt x="787847" y="347687"/>
+                  </a:lnTo>
+                  <a:lnTo>
+                    <a:pt x="859470" y="375905"/>
+                  </a:lnTo>
+                  <a:lnTo>
+                    <a:pt x="931092" y="403602"/>
+                  </a:lnTo>
+                  <a:lnTo>
+                    <a:pt x="1002715" y="430788"/>
+                  </a:lnTo>
+                  <a:lnTo>
+                    <a:pt x="1074337" y="457473"/>
+                  </a:lnTo>
+                  <a:lnTo>
+                    <a:pt x="1145960" y="483666"/>
+                  </a:lnTo>
+                  <a:lnTo>
+                    <a:pt x="1217582" y="509375"/>
+                  </a:lnTo>
+                  <a:lnTo>
+                    <a:pt x="1289205" y="534610"/>
+                  </a:lnTo>
+                  <a:lnTo>
+                    <a:pt x="1360827" y="559380"/>
+                  </a:lnTo>
+                  <a:lnTo>
+                    <a:pt x="1432450" y="583692"/>
+                  </a:lnTo>
+                  <a:lnTo>
+                    <a:pt x="1504073" y="607556"/>
+                  </a:lnTo>
+                  <a:lnTo>
+                    <a:pt x="1575695" y="630980"/>
+                  </a:lnTo>
+                  <a:lnTo>
+                    <a:pt x="1647318" y="653972"/>
+                  </a:lnTo>
+                  <a:lnTo>
+                    <a:pt x="1718940" y="676539"/>
+                  </a:lnTo>
+                  <a:lnTo>
+                    <a:pt x="1790563" y="698691"/>
+                  </a:lnTo>
+                  <a:lnTo>
+                    <a:pt x="1862185" y="720433"/>
+                  </a:lnTo>
+                  <a:lnTo>
+                    <a:pt x="1933808" y="741775"/>
+                  </a:lnTo>
+                  <a:lnTo>
+                    <a:pt x="2005430" y="762722"/>
+                  </a:lnTo>
+                  <a:lnTo>
+                    <a:pt x="2077053" y="783284"/>
+                  </a:lnTo>
+                  <a:lnTo>
+                    <a:pt x="2148675" y="803466"/>
+                  </a:lnTo>
+                  <a:lnTo>
+                    <a:pt x="2220298" y="823276"/>
+                  </a:lnTo>
+                  <a:lnTo>
+                    <a:pt x="2291920" y="842720"/>
+                  </a:lnTo>
+                  <a:lnTo>
+                    <a:pt x="2363543" y="861805"/>
+                  </a:lnTo>
+                  <a:lnTo>
+                    <a:pt x="2435165" y="880539"/>
+                  </a:lnTo>
+                  <a:lnTo>
+                    <a:pt x="2506788" y="898927"/>
+                  </a:lnTo>
+                  <a:lnTo>
+                    <a:pt x="2578410" y="916976"/>
+                  </a:lnTo>
+                  <a:lnTo>
+                    <a:pt x="2650033" y="934691"/>
+                  </a:lnTo>
+                  <a:lnTo>
+                    <a:pt x="2721655" y="952080"/>
+                  </a:lnTo>
+                  <a:lnTo>
+                    <a:pt x="2793278" y="969148"/>
+                  </a:lnTo>
+                  <a:lnTo>
+                    <a:pt x="2864901" y="985902"/>
+                  </a:lnTo>
+                  <a:lnTo>
+                    <a:pt x="2936523" y="1002346"/>
+                  </a:lnTo>
+                  <a:lnTo>
+                    <a:pt x="3008146" y="1018487"/>
+                  </a:lnTo>
+                  <a:lnTo>
+                    <a:pt x="3079768" y="1034330"/>
+                  </a:lnTo>
+                  <a:lnTo>
+                    <a:pt x="3151391" y="1049880"/>
+                  </a:lnTo>
+                  <a:lnTo>
+                    <a:pt x="3223013" y="1065144"/>
+                  </a:lnTo>
+                  <a:lnTo>
+                    <a:pt x="3294636" y="1080127"/>
+                  </a:lnTo>
+                  <a:lnTo>
+                    <a:pt x="3366258" y="1094833"/>
+                  </a:lnTo>
+                  <a:lnTo>
+                    <a:pt x="3437881" y="1109267"/>
+                  </a:lnTo>
+                  <a:lnTo>
+                    <a:pt x="3509503" y="1123436"/>
+                  </a:lnTo>
+                  <a:lnTo>
+                    <a:pt x="3581126" y="1137343"/>
+                  </a:lnTo>
+                  <a:lnTo>
+                    <a:pt x="3652748" y="1150993"/>
+                  </a:lnTo>
+                  <a:lnTo>
+                    <a:pt x="3724371" y="1164392"/>
+                  </a:lnTo>
+                  <a:lnTo>
+                    <a:pt x="3795993" y="1177543"/>
+                  </a:lnTo>
+                  <a:lnTo>
+                    <a:pt x="3867616" y="1190452"/>
+                  </a:lnTo>
+                  <a:lnTo>
+                    <a:pt x="3939238" y="1203123"/>
+                  </a:lnTo>
+                  <a:lnTo>
+                    <a:pt x="4010861" y="1215560"/>
+                  </a:lnTo>
+                  <a:lnTo>
+                    <a:pt x="4082483" y="1227767"/>
+                  </a:lnTo>
+                  <a:lnTo>
+                    <a:pt x="4154106" y="1239749"/>
+                  </a:lnTo>
+                  <a:lnTo>
+                    <a:pt x="4225729" y="1251511"/>
+                  </a:lnTo>
+                  <a:lnTo>
+                    <a:pt x="4297351" y="1263055"/>
+                  </a:lnTo>
+                  <a:lnTo>
+                    <a:pt x="4368974" y="1274386"/>
+                  </a:lnTo>
+                  <a:lnTo>
+                    <a:pt x="4440596" y="1285509"/>
+                  </a:lnTo>
+                  <a:lnTo>
+                    <a:pt x="4512219" y="1296426"/>
+                  </a:lnTo>
+                  <a:lnTo>
+                    <a:pt x="4583841" y="1307141"/>
+                  </a:lnTo>
+                  <a:lnTo>
+                    <a:pt x="4655464" y="1317659"/>
+                  </a:lnTo>
+                  <a:lnTo>
+                    <a:pt x="4727086" y="1327983"/>
+                  </a:lnTo>
+                  <a:lnTo>
+                    <a:pt x="4798709" y="1338117"/>
+                  </a:lnTo>
+                  <a:lnTo>
+                    <a:pt x="4870331" y="1348064"/>
+                  </a:lnTo>
+                  <a:lnTo>
+                    <a:pt x="4941954" y="1357827"/>
+                  </a:lnTo>
+                  <a:lnTo>
+                    <a:pt x="5013576" y="1367410"/>
+                  </a:lnTo>
+                  <a:lnTo>
+                    <a:pt x="5085199" y="1376816"/>
+                  </a:lnTo>
+                  <a:lnTo>
+                    <a:pt x="5156821" y="1386049"/>
+                  </a:lnTo>
+                  <a:lnTo>
+                    <a:pt x="5228444" y="1395111"/>
+                  </a:lnTo>
+                  <a:lnTo>
+                    <a:pt x="5300066" y="1404006"/>
+                  </a:lnTo>
+                  <a:lnTo>
+                    <a:pt x="5371689" y="1412737"/>
+                  </a:lnTo>
+                  <a:lnTo>
+                    <a:pt x="5443311" y="1421307"/>
+                  </a:lnTo>
+                  <a:lnTo>
+                    <a:pt x="5514934" y="1429719"/>
+                  </a:lnTo>
+                  <a:lnTo>
+                    <a:pt x="5586557" y="1437976"/>
+                  </a:lnTo>
+                  <a:lnTo>
+                    <a:pt x="5658179" y="1446080"/>
+                  </a:lnTo>
+                  <a:lnTo>
+                    <a:pt x="5729802" y="1454035"/>
+                  </a:lnTo>
+                  <a:lnTo>
+                    <a:pt x="5801424" y="1461843"/>
+                  </a:lnTo>
+                  <a:lnTo>
+                    <a:pt x="5873047" y="1469508"/>
+                  </a:lnTo>
+                  <a:lnTo>
+                    <a:pt x="5944669" y="1477030"/>
+                  </a:lnTo>
+                  <a:lnTo>
+                    <a:pt x="6016292" y="1484414"/>
+                  </a:lnTo>
+                  <a:lnTo>
+                    <a:pt x="6087914" y="1491662"/>
+                  </a:lnTo>
+                  <a:lnTo>
+                    <a:pt x="6159537" y="1498776"/>
+                  </a:lnTo>
+                  <a:lnTo>
+                    <a:pt x="6231159" y="1505759"/>
+                  </a:lnTo>
+                  <a:lnTo>
+                    <a:pt x="6302782" y="1512613"/>
+                  </a:lnTo>
+                  <a:lnTo>
+                    <a:pt x="6374404" y="1519340"/>
+                  </a:lnTo>
+                  <a:lnTo>
+                    <a:pt x="6446027" y="1525944"/>
+                  </a:lnTo>
+                  <a:lnTo>
+                    <a:pt x="6517649" y="1532425"/>
+                  </a:lnTo>
+                  <a:lnTo>
+                    <a:pt x="6589272" y="1538787"/>
+                  </a:lnTo>
+                  <a:lnTo>
+                    <a:pt x="6660894" y="1545032"/>
+                  </a:lnTo>
+                  <a:lnTo>
+                    <a:pt x="6732517" y="1551161"/>
+                  </a:lnTo>
+                  <a:lnTo>
+                    <a:pt x="6804139" y="1557178"/>
+                  </a:lnTo>
+                  <a:lnTo>
+                    <a:pt x="6875762" y="1563083"/>
+                  </a:lnTo>
+                  <a:lnTo>
+                    <a:pt x="6947385" y="1568880"/>
+                  </a:lnTo>
+                  <a:lnTo>
+                    <a:pt x="7019007" y="1574569"/>
+                  </a:lnTo>
+                  <a:lnTo>
+                    <a:pt x="7090630" y="1580154"/>
                   </a:lnTo>
                 </a:path>
               </a:pathLst>
@@ -4594,7 +4594,7 @@
           </p:nvSpPr>
           <p:spPr>
             <a:xfrm>
-              <a:off x="4313661" y="2073503"/>
+              <a:off x="4313914" y="2073503"/>
               <a:ext cx="0" cy="3649639"/>
             </a:xfrm>
             <a:custGeom>
@@ -4867,7 +4867,7 @@
           </p:nvSpPr>
           <p:spPr>
             <a:xfrm>
-              <a:off x="2280620" y="5785772"/>
+              <a:off x="2281218" y="5785772"/>
               <a:ext cx="161574" cy="80101"/>
             </a:xfrm>
             <a:prstGeom prst="rect">
@@ -4913,7 +4913,7 @@
           </p:nvSpPr>
           <p:spPr>
             <a:xfrm>
-              <a:off x="4204872" y="5785772"/>
+              <a:off x="4203472" y="5785772"/>
               <a:ext cx="62179" cy="80101"/>
             </a:xfrm>
             <a:prstGeom prst="rect">
@@ -4959,7 +4959,7 @@
           </p:nvSpPr>
           <p:spPr>
             <a:xfrm>
-              <a:off x="6048338" y="5785772"/>
+              <a:off x="6044938" y="5785772"/>
               <a:ext cx="124358" cy="80101"/>
             </a:xfrm>
             <a:prstGeom prst="rect">
@@ -5005,7 +5005,7 @@
           </p:nvSpPr>
           <p:spPr>
             <a:xfrm>
-              <a:off x="7922893" y="5785772"/>
+              <a:off x="7917494" y="5785772"/>
               <a:ext cx="124358" cy="80101"/>
             </a:xfrm>
             <a:prstGeom prst="rect">
@@ -5176,7 +5176,7 @@
                   <a:latin typeface="Helvetica"/>
                   <a:cs typeface="Helvetica"/>
                 </a:rPr>
-                <a:t>subHR per 10 % decline: 1.28 (0.91-1.79), p = 0.154  |  per IQR decline (Δ = 25.8 %): 1.88 (0.79-4.49)  |  IQR: [-10.7, 15.1] %</a:t>
+                <a:t>subHR per 10 % decline: 1.28 (0.91-1.79), p = 0.159  |  per IQR decline (Δ = 25.8 %): 1.87 (0.78-4.49)  |  IQR: [-10.6, 15.2] %</a:t>
               </a:r>
             </a:p>
           </p:txBody>
